--- a/docs/AutoNAS-final.pptx
+++ b/docs/AutoNAS-final.pptx
@@ -5,10 +5,10 @@
     <p:sldMasterId id="2147483708" r:id="rId1"/>
   </p:sldMasterIdLst>
   <p:notesMasterIdLst>
-    <p:notesMasterId r:id="rId49"/>
+    <p:notesMasterId r:id="rId50"/>
   </p:notesMasterIdLst>
   <p:handoutMasterIdLst>
-    <p:handoutMasterId r:id="rId50"/>
+    <p:handoutMasterId r:id="rId51"/>
   </p:handoutMasterIdLst>
   <p:sldIdLst>
     <p:sldId id="256" r:id="rId2"/>
@@ -58,21 +58,21 @@
     <p:sldId id="278" r:id="rId46"/>
     <p:sldId id="279" r:id="rId47"/>
     <p:sldId id="265" r:id="rId48"/>
-    <p:sldId id="324" r:id="rId61"/>
+    <p:sldId id="324" r:id="rId49"/>
   </p:sldIdLst>
   <p:sldSz cx="18288000" cy="10287000"/>
   <p:notesSz cx="6858000" cy="9144000"/>
   <p:embeddedFontLst>
     <p:embeddedFont>
       <p:font typeface="Abril Fatface" panose="02000503000000020003" pitchFamily="2" charset="0"/>
-      <p:regular r:id="rId51"/>
+      <p:regular r:id="rId52"/>
     </p:embeddedFont>
     <p:embeddedFont>
-      <p:font typeface="Merriweather" pitchFamily="2" charset="0"/>
-      <p:regular r:id="rId52"/>
-      <p:bold r:id="rId53"/>
-      <p:italic r:id="rId54"/>
-      <p:boldItalic r:id="rId55"/>
+      <p:font typeface="Merriweather" panose="00000500000000000000" pitchFamily="2" charset="0"/>
+      <p:regular r:id="rId53"/>
+      <p:bold r:id="rId54"/>
+      <p:italic r:id="rId55"/>
+      <p:boldItalic r:id="rId56"/>
     </p:embeddedFont>
   </p:embeddedFontLst>
   <p:defaultTextStyle>
@@ -4134,10 +4134,10 @@
             </a:pathLst>
           </a:custGeom>
           <a:blipFill>
-            <a:blip>
+            <a:blip r:embed="rId3">
               <a:extLst>
                 <a:ext uri="{96DAC541-7B7A-43D3-8B79-37D633B846F1}">
-                  <asvg:svgBlip xmlns:asvg="http://schemas.microsoft.com/office/drawing/2016/SVG/main" r:embed="rId3"/>
+                  <asvg:svgBlip xmlns:asvg="http://schemas.microsoft.com/office/drawing/2016/SVG/main" r:embed="rId4"/>
                 </a:ext>
               </a:extLst>
             </a:blip>
@@ -4148,7 +4148,10 @@
         </p:spPr>
         <p:txBody>
           <a:bodyPr/>
-          <a:p/>
+          <a:lstStyle/>
+          <a:p>
+            <a:endParaRPr/>
+          </a:p>
         </p:txBody>
       </p:sp>
       <p:sp>
@@ -4190,10 +4193,10 @@
             </a:pathLst>
           </a:custGeom>
           <a:blipFill>
-            <a:blip>
+            <a:blip r:embed="rId3">
               <a:extLst>
                 <a:ext uri="{96DAC541-7B7A-43D3-8B79-37D633B846F1}">
-                  <asvg:svgBlip xmlns:asvg="http://schemas.microsoft.com/office/drawing/2016/SVG/main" r:embed="rId3"/>
+                  <asvg:svgBlip xmlns:asvg="http://schemas.microsoft.com/office/drawing/2016/SVG/main" r:embed="rId4"/>
                 </a:ext>
               </a:extLst>
             </a:blip>
@@ -4209,7 +4212,10 @@
         </p:spPr>
         <p:txBody>
           <a:bodyPr/>
-          <a:p/>
+          <a:lstStyle/>
+          <a:p>
+            <a:endParaRPr/>
+          </a:p>
         </p:txBody>
       </p:sp>
       <p:sp>
@@ -4251,10 +4257,10 @@
             </a:pathLst>
           </a:custGeom>
           <a:blipFill>
-            <a:blip>
+            <a:blip r:embed="rId3">
               <a:extLst>
                 <a:ext uri="{96DAC541-7B7A-43D3-8B79-37D633B846F1}">
-                  <asvg:svgBlip xmlns:asvg="http://schemas.microsoft.com/office/drawing/2016/SVG/main" r:embed="rId3"/>
+                  <asvg:svgBlip xmlns:asvg="http://schemas.microsoft.com/office/drawing/2016/SVG/main" r:embed="rId4"/>
                 </a:ext>
               </a:extLst>
             </a:blip>
@@ -4265,7 +4271,10 @@
         </p:spPr>
         <p:txBody>
           <a:bodyPr/>
-          <a:p/>
+          <a:lstStyle/>
+          <a:p>
+            <a:endParaRPr/>
+          </a:p>
         </p:txBody>
       </p:sp>
       <p:sp>
@@ -4307,10 +4316,10 @@
             </a:pathLst>
           </a:custGeom>
           <a:blipFill>
-            <a:blip>
+            <a:blip r:embed="rId3">
               <a:extLst>
                 <a:ext uri="{96DAC541-7B7A-43D3-8B79-37D633B846F1}">
-                  <asvg:svgBlip xmlns:asvg="http://schemas.microsoft.com/office/drawing/2016/SVG/main" r:embed="rId3"/>
+                  <asvg:svgBlip xmlns:asvg="http://schemas.microsoft.com/office/drawing/2016/SVG/main" r:embed="rId4"/>
                 </a:ext>
               </a:extLst>
             </a:blip>
@@ -4321,7 +4330,10 @@
         </p:spPr>
         <p:txBody>
           <a:bodyPr/>
-          <a:p/>
+          <a:lstStyle/>
+          <a:p>
+            <a:endParaRPr/>
+          </a:p>
         </p:txBody>
       </p:sp>
       <p:sp>
@@ -4813,15 +4825,12 @@
                       </a:r>
                     </a:p>
                     <a:p>
-                      <a:r>
-                        <a:rPr sz="1000">
-                          <a:solidFill>
-                            <a:srgbClr val="000000"/>
-                          </a:solidFill>
-                          <a:latin typeface="Merriweather"/>
-                        </a:rPr>
-                        <a:t/>
-                      </a:r>
+                      <a:endParaRPr sz="1000">
+                        <a:solidFill>
+                          <a:srgbClr val="000000"/>
+                        </a:solidFill>
+                        <a:latin typeface="Merriweather"/>
+                      </a:endParaRPr>
                     </a:p>
                     <a:p>
                       <a:r>
@@ -5127,15 +5136,6 @@
                         <a:buFont typeface="Arial" panose="020B0604020202020204" pitchFamily="34" charset="0"/>
                         <a:buNone/>
                       </a:pPr>
-                      <a:r>
-                        <a:rPr sz="1000">
-                          <a:solidFill>
-                            <a:srgbClr val="000000"/>
-                          </a:solidFill>
-                          <a:latin typeface="Merriweather"/>
-                        </a:rPr>
-                        <a:t/>
-                      </a:r>
                       <a:endParaRPr lang="en-IN" dirty="0"/>
                     </a:p>
                   </a:txBody>
@@ -5420,15 +5420,6 @@
                         <a:buFont typeface="Arial" panose="020B0604020202020204" pitchFamily="34" charset="0"/>
                         <a:buNone/>
                       </a:pPr>
-                      <a:r>
-                        <a:rPr sz="1000">
-                          <a:solidFill>
-                            <a:srgbClr val="000000"/>
-                          </a:solidFill>
-                          <a:latin typeface="Merriweather"/>
-                        </a:rPr>
-                        <a:t/>
-                      </a:r>
                       <a:endParaRPr lang="en-IN" dirty="0"/>
                     </a:p>
                   </a:txBody>
@@ -5580,15 +5571,6 @@
                         <a:buFont typeface="Arial" panose="020B0604020202020204" pitchFamily="34" charset="0"/>
                         <a:buNone/>
                       </a:pPr>
-                      <a:r>
-                        <a:rPr sz="1000">
-                          <a:solidFill>
-                            <a:srgbClr val="000000"/>
-                          </a:solidFill>
-                          <a:latin typeface="Merriweather"/>
-                        </a:rPr>
-                        <a:t/>
-                      </a:r>
                       <a:endParaRPr lang="en-IN" sz="2000" b="1" dirty="0">
                         <a:latin typeface="Merriweather" panose="00000500000000000000" pitchFamily="2" charset="0"/>
                       </a:endParaRPr>
@@ -5800,15 +5782,12 @@
                       </a:r>
                     </a:p>
                     <a:p>
-                      <a:r>
-                        <a:rPr sz="1000">
-                          <a:solidFill>
-                            <a:srgbClr val="000000"/>
-                          </a:solidFill>
-                          <a:latin typeface="Merriweather"/>
-                        </a:rPr>
-                        <a:t/>
-                      </a:r>
+                      <a:endParaRPr sz="1000">
+                        <a:solidFill>
+                          <a:srgbClr val="000000"/>
+                        </a:solidFill>
+                        <a:latin typeface="Merriweather"/>
+                      </a:endParaRPr>
                     </a:p>
                     <a:p>
                       <a:r>
@@ -6114,15 +6093,6 @@
                         <a:buFont typeface="Arial" panose="020B0604020202020204" pitchFamily="34" charset="0"/>
                         <a:buNone/>
                       </a:pPr>
-                      <a:r>
-                        <a:rPr sz="1000">
-                          <a:solidFill>
-                            <a:srgbClr val="000000"/>
-                          </a:solidFill>
-                          <a:latin typeface="Merriweather"/>
-                        </a:rPr>
-                        <a:t/>
-                      </a:r>
                       <a:endParaRPr lang="en-IN" dirty="0"/>
                     </a:p>
                   </a:txBody>
@@ -6396,15 +6366,6 @@
                         <a:buFont typeface="Arial" panose="020B0604020202020204" pitchFamily="34" charset="0"/>
                         <a:buNone/>
                       </a:pPr>
-                      <a:r>
-                        <a:rPr sz="1000">
-                          <a:solidFill>
-                            <a:srgbClr val="000000"/>
-                          </a:solidFill>
-                          <a:latin typeface="Merriweather"/>
-                        </a:rPr>
-                        <a:t/>
-                      </a:r>
                       <a:endParaRPr lang="en-IN" dirty="0"/>
                     </a:p>
                   </a:txBody>
@@ -6567,15 +6528,6 @@
                         <a:buFont typeface="Arial" panose="020B0604020202020204" pitchFamily="34" charset="0"/>
                         <a:buNone/>
                       </a:pPr>
-                      <a:r>
-                        <a:rPr sz="1000">
-                          <a:solidFill>
-                            <a:srgbClr val="000000"/>
-                          </a:solidFill>
-                          <a:latin typeface="Merriweather"/>
-                        </a:rPr>
-                        <a:t/>
-                      </a:r>
                       <a:endParaRPr lang="en-IN" sz="2000" b="1" dirty="0">
                         <a:latin typeface="Merriweather" panose="00000500000000000000" pitchFamily="2" charset="0"/>
                       </a:endParaRPr>
@@ -6787,15 +6739,12 @@
                       </a:r>
                     </a:p>
                     <a:p>
-                      <a:r>
-                        <a:rPr sz="1000">
-                          <a:solidFill>
-                            <a:srgbClr val="000000"/>
-                          </a:solidFill>
-                          <a:latin typeface="Merriweather"/>
-                        </a:rPr>
-                        <a:t/>
-                      </a:r>
+                      <a:endParaRPr sz="1000">
+                        <a:solidFill>
+                          <a:srgbClr val="000000"/>
+                        </a:solidFill>
+                        <a:latin typeface="Merriweather"/>
+                      </a:endParaRPr>
                     </a:p>
                     <a:p>
                       <a:r>
@@ -7101,15 +7050,6 @@
                         <a:buFont typeface="Arial" panose="020B0604020202020204" pitchFamily="34" charset="0"/>
                         <a:buNone/>
                       </a:pPr>
-                      <a:r>
-                        <a:rPr sz="1000">
-                          <a:solidFill>
-                            <a:srgbClr val="000000"/>
-                          </a:solidFill>
-                          <a:latin typeface="Merriweather"/>
-                        </a:rPr>
-                        <a:t/>
-                      </a:r>
                       <a:endParaRPr lang="en-IN" dirty="0"/>
                     </a:p>
                   </a:txBody>
@@ -7372,15 +7312,6 @@
                         <a:buFont typeface="Arial" panose="020B0604020202020204" pitchFamily="34" charset="0"/>
                         <a:buNone/>
                       </a:pPr>
-                      <a:r>
-                        <a:rPr sz="1000">
-                          <a:solidFill>
-                            <a:srgbClr val="000000"/>
-                          </a:solidFill>
-                          <a:latin typeface="Merriweather"/>
-                        </a:rPr>
-                        <a:t/>
-                      </a:r>
                       <a:endParaRPr lang="en-IN" dirty="0"/>
                     </a:p>
                   </a:txBody>
@@ -7543,15 +7474,6 @@
                         <a:buFont typeface="Arial" panose="020B0604020202020204" pitchFamily="34" charset="0"/>
                         <a:buNone/>
                       </a:pPr>
-                      <a:r>
-                        <a:rPr sz="1000">
-                          <a:solidFill>
-                            <a:srgbClr val="000000"/>
-                          </a:solidFill>
-                          <a:latin typeface="Merriweather"/>
-                        </a:rPr>
-                        <a:t/>
-                      </a:r>
                       <a:endParaRPr lang="en-IN" sz="2000" b="1" dirty="0">
                         <a:latin typeface="Merriweather" panose="00000500000000000000" pitchFamily="2" charset="0"/>
                       </a:endParaRPr>
@@ -7703,14 +7625,14 @@
           <p:nvPr>
             <p:extLst>
               <p:ext uri="{D42A27DB-BD31-4B8C-83A1-F6EECF244321}">
-                <p14:modId xmlns:p14="http://schemas.microsoft.com/office/powerpoint/2010/main" val="1950435507"/>
+                <p14:modId xmlns:p14="http://schemas.microsoft.com/office/powerpoint/2010/main" val="3206313386"/>
               </p:ext>
             </p:extLst>
           </p:nvPr>
         </p:nvGraphicFramePr>
         <p:xfrm>
           <a:off x="914400" y="1760060"/>
-          <a:ext cx="16916400" cy="8359521"/>
+          <a:ext cx="16916400" cy="8029035"/>
         </p:xfrm>
         <a:graphic>
           <a:graphicData uri="http://schemas.openxmlformats.org/drawingml/2006/table">
@@ -7753,29 +7675,35 @@
                         <a:buAutoNum type="arabicPeriod" startAt="9"/>
                       </a:pPr>
                       <a:r>
-                        <a:rPr sz="1000">
+                        <a:rPr sz="1800" dirty="0" err="1">
                           <a:solidFill>
                             <a:srgbClr val="000000"/>
                           </a:solidFill>
                           <a:latin typeface="Merriweather"/>
                         </a:rPr>
-                        <a:t>ProxylessNAS: Direct Neural Architecture Search on Target Task and Hardware</a:t>
-                      </a:r>
-                    </a:p>
-                    <a:p>
-                      <a:r>
-                        <a:rPr sz="1000">
+                        <a:t>ProxylessNAS</a:t>
+                      </a:r>
+                      <a:r>
+                        <a:rPr sz="1800" dirty="0">
                           <a:solidFill>
                             <a:srgbClr val="000000"/>
                           </a:solidFill>
                           <a:latin typeface="Merriweather"/>
                         </a:rPr>
-                        <a:t/>
-                      </a:r>
-                    </a:p>
-                    <a:p>
-                      <a:r>
-                        <a:rPr sz="1000" b="1">
+                        <a:t>: Direct Neural Architecture Search on Target Task and Hardware</a:t>
+                      </a:r>
+                    </a:p>
+                    <a:p>
+                      <a:endParaRPr sz="1800" dirty="0">
+                        <a:solidFill>
+                          <a:srgbClr val="000000"/>
+                        </a:solidFill>
+                        <a:latin typeface="Merriweather"/>
+                      </a:endParaRPr>
+                    </a:p>
+                    <a:p>
+                      <a:r>
+                        <a:rPr sz="1800" b="1" dirty="0">
                           <a:solidFill>
                             <a:srgbClr val="000000"/>
                           </a:solidFill>
@@ -7786,7 +7714,7 @@
                     </a:p>
                     <a:p>
                       <a:r>
-                        <a:rPr sz="1000" b="1">
+                        <a:rPr sz="1800" b="1" dirty="0">
                           <a:solidFill>
                             <a:srgbClr val="000000"/>
                           </a:solidFill>
@@ -7797,7 +7725,7 @@
                     </a:p>
                     <a:p>
                       <a:r>
-                        <a:rPr sz="1000" b="1">
+                        <a:rPr sz="1800" b="1" dirty="0">
                           <a:solidFill>
                             <a:srgbClr val="000000"/>
                           </a:solidFill>
@@ -7860,7 +7788,7 @@
                         <a:buNone/>
                       </a:pPr>
                       <a:r>
-                        <a:rPr sz="1000" b="1">
+                        <a:rPr sz="1800" b="1">
                           <a:solidFill>
                             <a:srgbClr val="000000"/>
                           </a:solidFill>
@@ -7871,7 +7799,7 @@
                     </a:p>
                     <a:p>
                       <a:r>
-                        <a:rPr sz="900">
+                        <a:rPr sz="1600">
                           <a:solidFill>
                             <a:srgbClr val="000000"/>
                           </a:solidFill>
@@ -7882,7 +7810,7 @@
                     </a:p>
                     <a:p>
                       <a:r>
-                        <a:rPr sz="900">
+                        <a:rPr sz="1600">
                           <a:solidFill>
                             <a:srgbClr val="000000"/>
                           </a:solidFill>
@@ -7893,7 +7821,7 @@
                     </a:p>
                     <a:p>
                       <a:r>
-                        <a:rPr sz="900">
+                        <a:rPr sz="1600">
                           <a:solidFill>
                             <a:srgbClr val="000000"/>
                           </a:solidFill>
@@ -7904,7 +7832,7 @@
                     </a:p>
                     <a:p>
                       <a:r>
-                        <a:rPr sz="900">
+                        <a:rPr sz="1600">
                           <a:solidFill>
                             <a:srgbClr val="000000"/>
                           </a:solidFill>
@@ -7967,7 +7895,7 @@
                         <a:buNone/>
                       </a:pPr>
                       <a:r>
-                        <a:rPr sz="1000" b="1">
+                        <a:rPr sz="1800" b="1">
                           <a:solidFill>
                             <a:srgbClr val="000000"/>
                           </a:solidFill>
@@ -7978,7 +7906,7 @@
                     </a:p>
                     <a:p>
                       <a:r>
-                        <a:rPr sz="900">
+                        <a:rPr sz="1600">
                           <a:solidFill>
                             <a:srgbClr val="000000"/>
                           </a:solidFill>
@@ -7989,7 +7917,7 @@
                     </a:p>
                     <a:p>
                       <a:r>
-                        <a:rPr sz="900">
+                        <a:rPr sz="1600">
                           <a:solidFill>
                             <a:srgbClr val="000000"/>
                           </a:solidFill>
@@ -8000,7 +7928,7 @@
                     </a:p>
                     <a:p>
                       <a:r>
-                        <a:rPr sz="900">
+                        <a:rPr sz="1600">
                           <a:solidFill>
                             <a:srgbClr val="000000"/>
                           </a:solidFill>
@@ -8011,7 +7939,7 @@
                     </a:p>
                     <a:p>
                       <a:r>
-                        <a:rPr sz="900">
+                        <a:rPr sz="1600">
                           <a:solidFill>
                             <a:srgbClr val="000000"/>
                           </a:solidFill>
@@ -8077,15 +8005,6 @@
                         <a:buFont typeface="Arial" panose="020B0604020202020204" pitchFamily="34" charset="0"/>
                         <a:buNone/>
                       </a:pPr>
-                      <a:r>
-                        <a:rPr sz="1000">
-                          <a:solidFill>
-                            <a:srgbClr val="000000"/>
-                          </a:solidFill>
-                          <a:latin typeface="Merriweather"/>
-                        </a:rPr>
-                        <a:t/>
-                      </a:r>
                       <a:endParaRPr lang="en-IN" dirty="0"/>
                     </a:p>
                   </a:txBody>
@@ -8142,7 +8061,7 @@
                         <a:buNone/>
                       </a:pPr>
                       <a:r>
-                        <a:rPr sz="1000">
+                        <a:rPr sz="1800">
                           <a:solidFill>
                             <a:srgbClr val="000000"/>
                           </a:solidFill>
@@ -8153,7 +8072,7 @@
                     </a:p>
                     <a:p>
                       <a:r>
-                        <a:rPr sz="900">
+                        <a:rPr sz="1600">
                           <a:solidFill>
                             <a:srgbClr val="000000"/>
                           </a:solidFill>
@@ -8164,7 +8083,7 @@
                     </a:p>
                     <a:p>
                       <a:r>
-                        <a:rPr sz="900">
+                        <a:rPr sz="1600">
                           <a:solidFill>
                             <a:srgbClr val="000000"/>
                           </a:solidFill>
@@ -8175,7 +8094,7 @@
                     </a:p>
                     <a:p>
                       <a:r>
-                        <a:rPr sz="900">
+                        <a:rPr sz="1600">
                           <a:solidFill>
                             <a:srgbClr val="000000"/>
                           </a:solidFill>
@@ -8238,7 +8157,7 @@
                         <a:buNone/>
                       </a:pPr>
                       <a:r>
-                        <a:rPr sz="1000" b="1">
+                        <a:rPr sz="1800" b="1">
                           <a:solidFill>
                             <a:srgbClr val="000000"/>
                           </a:solidFill>
@@ -8249,7 +8168,7 @@
                     </a:p>
                     <a:p>
                       <a:r>
-                        <a:rPr sz="900">
+                        <a:rPr sz="1600">
                           <a:solidFill>
                             <a:srgbClr val="000000"/>
                           </a:solidFill>
@@ -8260,7 +8179,7 @@
                     </a:p>
                     <a:p>
                       <a:r>
-                        <a:rPr sz="900">
+                        <a:rPr sz="1600">
                           <a:solidFill>
                             <a:srgbClr val="000000"/>
                           </a:solidFill>
@@ -8271,7 +8190,7 @@
                     </a:p>
                     <a:p>
                       <a:r>
-                        <a:rPr sz="900">
+                        <a:rPr sz="1600">
                           <a:solidFill>
                             <a:srgbClr val="000000"/>
                           </a:solidFill>
@@ -8282,7 +8201,7 @@
                     </a:p>
                     <a:p>
                       <a:r>
-                        <a:rPr sz="900">
+                        <a:rPr sz="1600">
                           <a:solidFill>
                             <a:srgbClr val="000000"/>
                           </a:solidFill>
@@ -8348,15 +8267,6 @@
                         <a:buFont typeface="Arial" panose="020B0604020202020204" pitchFamily="34" charset="0"/>
                         <a:buNone/>
                       </a:pPr>
-                      <a:r>
-                        <a:rPr sz="1000">
-                          <a:solidFill>
-                            <a:srgbClr val="000000"/>
-                          </a:solidFill>
-                          <a:latin typeface="Merriweather"/>
-                        </a:rPr>
-                        <a:t/>
-                      </a:r>
                       <a:endParaRPr lang="en-IN" dirty="0"/>
                     </a:p>
                   </a:txBody>
@@ -8413,7 +8323,7 @@
                         <a:buNone/>
                       </a:pPr>
                       <a:r>
-                        <a:rPr sz="1000">
+                        <a:rPr sz="1800">
                           <a:solidFill>
                             <a:srgbClr val="000000"/>
                           </a:solidFill>
@@ -8424,7 +8334,7 @@
                     </a:p>
                     <a:p>
                       <a:r>
-                        <a:rPr sz="900">
+                        <a:rPr sz="1600">
                           <a:solidFill>
                             <a:srgbClr val="000000"/>
                           </a:solidFill>
@@ -8435,7 +8345,7 @@
                     </a:p>
                     <a:p>
                       <a:r>
-                        <a:rPr sz="900">
+                        <a:rPr sz="1600">
                           <a:solidFill>
                             <a:srgbClr val="000000"/>
                           </a:solidFill>
@@ -8446,7 +8356,7 @@
                     </a:p>
                     <a:p>
                       <a:r>
-                        <a:rPr sz="900">
+                        <a:rPr sz="1600">
                           <a:solidFill>
                             <a:srgbClr val="000000"/>
                           </a:solidFill>
@@ -8508,16 +8418,7 @@
                         <a:buFont typeface="Arial" panose="020B0604020202020204" pitchFamily="34" charset="0"/>
                         <a:buNone/>
                       </a:pPr>
-                      <a:r>
-                        <a:rPr sz="1000">
-                          <a:solidFill>
-                            <a:srgbClr val="000000"/>
-                          </a:solidFill>
-                          <a:latin typeface="Merriweather"/>
-                        </a:rPr>
-                        <a:t/>
-                      </a:r>
-                      <a:endParaRPr lang="en-IN" sz="2000" b="1" dirty="0">
+                      <a:endParaRPr lang="en-IN" sz="4400" b="1" dirty="0">
                         <a:latin typeface="Merriweather" panose="00000500000000000000" pitchFamily="2" charset="0"/>
                       </a:endParaRPr>
                     </a:p>
@@ -11449,14 +11350,14 @@
           <p:nvPr>
             <p:extLst>
               <p:ext uri="{D42A27DB-BD31-4B8C-83A1-F6EECF244321}">
-                <p14:modId xmlns:p14="http://schemas.microsoft.com/office/powerpoint/2010/main" val="1110551797"/>
+                <p14:modId xmlns:p14="http://schemas.microsoft.com/office/powerpoint/2010/main" val="2619580868"/>
               </p:ext>
             </p:extLst>
           </p:nvPr>
         </p:nvGraphicFramePr>
         <p:xfrm>
           <a:off x="457200" y="1760060"/>
-          <a:ext cx="17373600" cy="8359521"/>
+          <a:ext cx="17373600" cy="7924960"/>
         </p:xfrm>
         <a:graphic>
           <a:graphicData uri="http://schemas.openxmlformats.org/drawingml/2006/table">
@@ -11499,7 +11400,7 @@
                         <a:buAutoNum type="arabicPeriod" startAt="13"/>
                       </a:pPr>
                       <a:r>
-                        <a:rPr sz="1000">
+                        <a:rPr sz="2000" dirty="0">
                           <a:solidFill>
                             <a:srgbClr val="000000"/>
                           </a:solidFill>
@@ -11509,41 +11410,38 @@
                       </a:r>
                     </a:p>
                     <a:p>
-                      <a:r>
-                        <a:rPr sz="1000">
+                      <a:endParaRPr sz="2000" dirty="0">
+                        <a:solidFill>
+                          <a:srgbClr val="000000"/>
+                        </a:solidFill>
+                        <a:latin typeface="Merriweather"/>
+                      </a:endParaRPr>
+                    </a:p>
+                    <a:p>
+                      <a:r>
+                        <a:rPr sz="2000" b="1" dirty="0">
                           <a:solidFill>
                             <a:srgbClr val="000000"/>
                           </a:solidFill>
                           <a:latin typeface="Merriweather"/>
                         </a:rPr>
-                        <a:t/>
-                      </a:r>
-                    </a:p>
-                    <a:p>
-                      <a:r>
-                        <a:rPr sz="1000" b="1">
+                        <a:t>AUTHOR: X. Dong, Y. Yang</a:t>
+                      </a:r>
+                    </a:p>
+                    <a:p>
+                      <a:r>
+                        <a:rPr sz="2000" b="1" dirty="0">
                           <a:solidFill>
                             <a:srgbClr val="000000"/>
                           </a:solidFill>
                           <a:latin typeface="Merriweather"/>
                         </a:rPr>
-                        <a:t>AUTHOR: X. Dong, Y. Yang</a:t>
-                      </a:r>
-                    </a:p>
-                    <a:p>
-                      <a:r>
-                        <a:rPr sz="1000" b="1">
-                          <a:solidFill>
-                            <a:srgbClr val="000000"/>
-                          </a:solidFill>
-                          <a:latin typeface="Merriweather"/>
-                        </a:rPr>
                         <a:t>YEAR: 2020</a:t>
                       </a:r>
                     </a:p>
                     <a:p>
                       <a:r>
-                        <a:rPr sz="1000" b="1">
+                        <a:rPr sz="2000" b="1" dirty="0">
                           <a:solidFill>
                             <a:srgbClr val="000000"/>
                           </a:solidFill>
@@ -11606,7 +11504,7 @@
                         <a:buNone/>
                       </a:pPr>
                       <a:r>
-                        <a:rPr sz="1000" b="1">
+                        <a:rPr sz="2000" b="1">
                           <a:solidFill>
                             <a:srgbClr val="000000"/>
                           </a:solidFill>
@@ -11617,7 +11515,7 @@
                     </a:p>
                     <a:p>
                       <a:r>
-                        <a:rPr sz="900">
+                        <a:rPr sz="1800">
                           <a:solidFill>
                             <a:srgbClr val="000000"/>
                           </a:solidFill>
@@ -11628,7 +11526,7 @@
                     </a:p>
                     <a:p>
                       <a:r>
-                        <a:rPr sz="900">
+                        <a:rPr sz="1800">
                           <a:solidFill>
                             <a:srgbClr val="000000"/>
                           </a:solidFill>
@@ -11639,7 +11537,7 @@
                     </a:p>
                     <a:p>
                       <a:r>
-                        <a:rPr sz="900">
+                        <a:rPr sz="1800">
                           <a:solidFill>
                             <a:srgbClr val="000000"/>
                           </a:solidFill>
@@ -11650,7 +11548,7 @@
                     </a:p>
                     <a:p>
                       <a:r>
-                        <a:rPr sz="900">
+                        <a:rPr sz="1800">
                           <a:solidFill>
                             <a:srgbClr val="000000"/>
                           </a:solidFill>
@@ -11713,7 +11611,7 @@
                         <a:buNone/>
                       </a:pPr>
                       <a:r>
-                        <a:rPr sz="1000" b="1">
+                        <a:rPr sz="2000" b="1">
                           <a:solidFill>
                             <a:srgbClr val="000000"/>
                           </a:solidFill>
@@ -11724,7 +11622,7 @@
                     </a:p>
                     <a:p>
                       <a:r>
-                        <a:rPr sz="900">
+                        <a:rPr sz="1800">
                           <a:solidFill>
                             <a:srgbClr val="000000"/>
                           </a:solidFill>
@@ -11735,7 +11633,7 @@
                     </a:p>
                     <a:p>
                       <a:r>
-                        <a:rPr sz="900">
+                        <a:rPr sz="1800">
                           <a:solidFill>
                             <a:srgbClr val="000000"/>
                           </a:solidFill>
@@ -11746,7 +11644,7 @@
                     </a:p>
                     <a:p>
                       <a:r>
-                        <a:rPr sz="900">
+                        <a:rPr sz="1800">
                           <a:solidFill>
                             <a:srgbClr val="000000"/>
                           </a:solidFill>
@@ -11757,7 +11655,7 @@
                     </a:p>
                     <a:p>
                       <a:r>
-                        <a:rPr sz="900">
+                        <a:rPr sz="1800">
                           <a:solidFill>
                             <a:srgbClr val="000000"/>
                           </a:solidFill>
@@ -11823,15 +11721,6 @@
                         <a:buFont typeface="Arial" panose="020B0604020202020204" pitchFamily="34" charset="0"/>
                         <a:buNone/>
                       </a:pPr>
-                      <a:r>
-                        <a:rPr sz="1000">
-                          <a:solidFill>
-                            <a:srgbClr val="000000"/>
-                          </a:solidFill>
-                          <a:latin typeface="Merriweather"/>
-                        </a:rPr>
-                        <a:t/>
-                      </a:r>
                       <a:endParaRPr lang="en-IN" dirty="0"/>
                     </a:p>
                   </a:txBody>
@@ -11888,7 +11777,7 @@
                         <a:buNone/>
                       </a:pPr>
                       <a:r>
-                        <a:rPr sz="1000">
+                        <a:rPr sz="2000">
                           <a:solidFill>
                             <a:srgbClr val="000000"/>
                           </a:solidFill>
@@ -11899,7 +11788,7 @@
                     </a:p>
                     <a:p>
                       <a:r>
-                        <a:rPr sz="900">
+                        <a:rPr sz="1800">
                           <a:solidFill>
                             <a:srgbClr val="000000"/>
                           </a:solidFill>
@@ -11910,7 +11799,7 @@
                     </a:p>
                     <a:p>
                       <a:r>
-                        <a:rPr sz="900">
+                        <a:rPr sz="1800">
                           <a:solidFill>
                             <a:srgbClr val="000000"/>
                           </a:solidFill>
@@ -11921,7 +11810,7 @@
                     </a:p>
                     <a:p>
                       <a:r>
-                        <a:rPr sz="900">
+                        <a:rPr sz="1800">
                           <a:solidFill>
                             <a:srgbClr val="000000"/>
                           </a:solidFill>
@@ -11984,7 +11873,7 @@
                         <a:buNone/>
                       </a:pPr>
                       <a:r>
-                        <a:rPr sz="1000" b="1">
+                        <a:rPr sz="2000" b="1">
                           <a:solidFill>
                             <a:srgbClr val="000000"/>
                           </a:solidFill>
@@ -11995,7 +11884,7 @@
                     </a:p>
                     <a:p>
                       <a:r>
-                        <a:rPr sz="900">
+                        <a:rPr sz="1800">
                           <a:solidFill>
                             <a:srgbClr val="000000"/>
                           </a:solidFill>
@@ -12006,7 +11895,7 @@
                     </a:p>
                     <a:p>
                       <a:r>
-                        <a:rPr sz="900">
+                        <a:rPr sz="1800">
                           <a:solidFill>
                             <a:srgbClr val="000000"/>
                           </a:solidFill>
@@ -12017,7 +11906,7 @@
                     </a:p>
                     <a:p>
                       <a:r>
-                        <a:rPr sz="900">
+                        <a:rPr sz="1800">
                           <a:solidFill>
                             <a:srgbClr val="000000"/>
                           </a:solidFill>
@@ -12028,7 +11917,7 @@
                     </a:p>
                     <a:p>
                       <a:r>
-                        <a:rPr sz="900">
+                        <a:rPr sz="1800">
                           <a:solidFill>
                             <a:srgbClr val="000000"/>
                           </a:solidFill>
@@ -12094,15 +11983,6 @@
                         <a:buFont typeface="Arial" panose="020B0604020202020204" pitchFamily="34" charset="0"/>
                         <a:buNone/>
                       </a:pPr>
-                      <a:r>
-                        <a:rPr sz="1000">
-                          <a:solidFill>
-                            <a:srgbClr val="000000"/>
-                          </a:solidFill>
-                          <a:latin typeface="Merriweather"/>
-                        </a:rPr>
-                        <a:t/>
-                      </a:r>
                       <a:endParaRPr lang="en-IN" dirty="0"/>
                     </a:p>
                   </a:txBody>
@@ -12159,7 +12039,7 @@
                         <a:buNone/>
                       </a:pPr>
                       <a:r>
-                        <a:rPr sz="1000">
+                        <a:rPr sz="2000">
                           <a:solidFill>
                             <a:srgbClr val="000000"/>
                           </a:solidFill>
@@ -12170,7 +12050,7 @@
                     </a:p>
                     <a:p>
                       <a:r>
-                        <a:rPr sz="900">
+                        <a:rPr sz="1800">
                           <a:solidFill>
                             <a:srgbClr val="000000"/>
                           </a:solidFill>
@@ -12181,7 +12061,7 @@
                     </a:p>
                     <a:p>
                       <a:r>
-                        <a:rPr sz="900">
+                        <a:rPr sz="1800">
                           <a:solidFill>
                             <a:srgbClr val="000000"/>
                           </a:solidFill>
@@ -12192,7 +12072,7 @@
                     </a:p>
                     <a:p>
                       <a:r>
-                        <a:rPr sz="900">
+                        <a:rPr sz="1800">
                           <a:solidFill>
                             <a:srgbClr val="000000"/>
                           </a:solidFill>
@@ -12203,7 +12083,7 @@
                     </a:p>
                     <a:p>
                       <a:r>
-                        <a:rPr sz="900">
+                        <a:rPr sz="1800">
                           <a:solidFill>
                             <a:srgbClr val="000000"/>
                           </a:solidFill>
@@ -12265,16 +12145,7 @@
                         <a:buFont typeface="Arial" panose="020B0604020202020204" pitchFamily="34" charset="0"/>
                         <a:buNone/>
                       </a:pPr>
-                      <a:r>
-                        <a:rPr sz="1000">
-                          <a:solidFill>
-                            <a:srgbClr val="000000"/>
-                          </a:solidFill>
-                          <a:latin typeface="Merriweather"/>
-                        </a:rPr>
-                        <a:t/>
-                      </a:r>
-                      <a:endParaRPr lang="en-IN" sz="2000" b="1" dirty="0">
+                      <a:endParaRPr lang="en-IN" sz="4800" b="1" dirty="0">
                         <a:latin typeface="Merriweather" panose="00000500000000000000" pitchFamily="2" charset="0"/>
                       </a:endParaRPr>
                     </a:p>
@@ -12483,30 +12354,24 @@
                     </a:p>
                     <a:p>
                       <a:pPr algn="l"/>
+                      <a:endParaRPr sz="2000" b="1">
+                        <a:latin typeface="Merriweather"/>
+                      </a:endParaRPr>
+                    </a:p>
+                    <a:p>
+                      <a:pPr algn="l"/>
                       <a:r>
                         <a:rPr sz="2000" b="1">
                           <a:latin typeface="Merriweather"/>
                         </a:rPr>
-                        <a:t/>
+                        <a:t>AUTHOR: H. D. Masethe, M. A. Masethe  Date: 2014</a:t>
                       </a:r>
                     </a:p>
                     <a:p>
                       <a:pPr algn="l"/>
-                      <a:r>
-                        <a:rPr sz="2000" b="1">
-                          <a:latin typeface="Merriweather"/>
-                        </a:rPr>
-                        <a:t>AUTHOR: H. D. Masethe, M. A. Masethe  Date: 2014</a:t>
-                      </a:r>
-                    </a:p>
-                    <a:p>
-                      <a:pPr algn="l"/>
-                      <a:r>
-                        <a:rPr sz="2000" b="1">
-                          <a:latin typeface="Merriweather"/>
-                        </a:rPr>
-                        <a:t/>
-                      </a:r>
+                      <a:endParaRPr sz="2000" b="1">
+                        <a:latin typeface="Merriweather"/>
+                      </a:endParaRPr>
                     </a:p>
                     <a:p>
                       <a:pPr algn="l"/>
@@ -13341,30 +13206,24 @@
                     </a:p>
                     <a:p>
                       <a:pPr algn="l"/>
+                      <a:endParaRPr sz="2000" b="1">
+                        <a:latin typeface="Merriweather"/>
+                      </a:endParaRPr>
+                    </a:p>
+                    <a:p>
+                      <a:pPr algn="l"/>
                       <a:r>
                         <a:rPr sz="2000" b="1">
                           <a:latin typeface="Merriweather"/>
                         </a:rPr>
-                        <a:t/>
+                        <a:t>AUTHOR: C. Ordonez  Date: 2006</a:t>
                       </a:r>
                     </a:p>
                     <a:p>
                       <a:pPr algn="l"/>
-                      <a:r>
-                        <a:rPr sz="2000" b="1">
-                          <a:latin typeface="Merriweather"/>
-                        </a:rPr>
-                        <a:t>AUTHOR: C. Ordonez  Date: 2006</a:t>
-                      </a:r>
-                    </a:p>
-                    <a:p>
-                      <a:pPr algn="l"/>
-                      <a:r>
-                        <a:rPr sz="2000" b="1">
-                          <a:latin typeface="Merriweather"/>
-                        </a:rPr>
-                        <a:t/>
-                      </a:r>
+                      <a:endParaRPr sz="2000" b="1">
+                        <a:latin typeface="Merriweather"/>
+                      </a:endParaRPr>
                     </a:p>
                     <a:p>
                       <a:pPr algn="l"/>
@@ -14109,10 +13968,10 @@
             </a:pathLst>
           </a:custGeom>
           <a:blipFill>
-            <a:blip>
+            <a:blip r:embed="rId2">
               <a:extLst>
                 <a:ext uri="{96DAC541-7B7A-43D3-8B79-37D633B846F1}">
-                  <asvg:svgBlip xmlns:asvg="http://schemas.microsoft.com/office/drawing/2016/SVG/main" r:embed="rId2"/>
+                  <asvg:svgBlip xmlns:asvg="http://schemas.microsoft.com/office/drawing/2016/SVG/main" r:embed="rId3"/>
                 </a:ext>
               </a:extLst>
             </a:blip>
@@ -14123,7 +13982,10 @@
         </p:spPr>
         <p:txBody>
           <a:bodyPr/>
-          <a:p/>
+          <a:lstStyle/>
+          <a:p>
+            <a:endParaRPr/>
+          </a:p>
         </p:txBody>
       </p:sp>
       <p:sp>
@@ -14165,10 +14027,10 @@
             </a:pathLst>
           </a:custGeom>
           <a:blipFill>
-            <a:blip>
+            <a:blip r:embed="rId2">
               <a:extLst>
                 <a:ext uri="{96DAC541-7B7A-43D3-8B79-37D633B846F1}">
-                  <asvg:svgBlip xmlns:asvg="http://schemas.microsoft.com/office/drawing/2016/SVG/main" r:embed="rId2"/>
+                  <asvg:svgBlip xmlns:asvg="http://schemas.microsoft.com/office/drawing/2016/SVG/main" r:embed="rId3"/>
                 </a:ext>
               </a:extLst>
             </a:blip>
@@ -14179,7 +14041,10 @@
         </p:spPr>
         <p:txBody>
           <a:bodyPr/>
-          <a:p/>
+          <a:lstStyle/>
+          <a:p>
+            <a:endParaRPr/>
+          </a:p>
         </p:txBody>
       </p:sp>
       <p:sp>
@@ -14699,10 +14564,10 @@
             </a:pathLst>
           </a:custGeom>
           <a:blipFill>
-            <a:blip>
+            <a:blip r:embed="rId2">
               <a:extLst>
                 <a:ext uri="{96DAC541-7B7A-43D3-8B79-37D633B846F1}">
-                  <asvg:svgBlip xmlns:asvg="http://schemas.microsoft.com/office/drawing/2016/SVG/main" r:embed="rId2"/>
+                  <asvg:svgBlip xmlns:asvg="http://schemas.microsoft.com/office/drawing/2016/SVG/main" r:embed="rId3"/>
                 </a:ext>
               </a:extLst>
             </a:blip>
@@ -14713,7 +14578,10 @@
         </p:spPr>
         <p:txBody>
           <a:bodyPr/>
-          <a:p/>
+          <a:lstStyle/>
+          <a:p>
+            <a:endParaRPr/>
+          </a:p>
         </p:txBody>
       </p:sp>
       <p:sp>
@@ -14761,10 +14629,10 @@
             </a:pathLst>
           </a:custGeom>
           <a:blipFill>
-            <a:blip>
+            <a:blip r:embed="rId2">
               <a:extLst>
                 <a:ext uri="{96DAC541-7B7A-43D3-8B79-37D633B846F1}">
-                  <asvg:svgBlip xmlns:asvg="http://schemas.microsoft.com/office/drawing/2016/SVG/main" r:embed="rId2"/>
+                  <asvg:svgBlip xmlns:asvg="http://schemas.microsoft.com/office/drawing/2016/SVG/main" r:embed="rId3"/>
                 </a:ext>
               </a:extLst>
             </a:blip>
@@ -14775,7 +14643,10 @@
         </p:spPr>
         <p:txBody>
           <a:bodyPr/>
-          <a:p/>
+          <a:lstStyle/>
+          <a:p>
+            <a:endParaRPr/>
+          </a:p>
         </p:txBody>
       </p:sp>
       <p:sp>
@@ -15189,10 +15060,10 @@
             </a:pathLst>
           </a:custGeom>
           <a:blipFill>
-            <a:blip>
+            <a:blip r:embed="rId4">
               <a:extLst>
                 <a:ext uri="{96DAC541-7B7A-43D3-8B79-37D633B846F1}">
-                  <asvg:svgBlip xmlns:asvg="http://schemas.microsoft.com/office/drawing/2016/SVG/main" r:embed="rId3"/>
+                  <asvg:svgBlip xmlns:asvg="http://schemas.microsoft.com/office/drawing/2016/SVG/main" r:embed="rId5"/>
                 </a:ext>
               </a:extLst>
             </a:blip>
@@ -15203,7 +15074,10 @@
         </p:spPr>
         <p:txBody>
           <a:bodyPr/>
-          <a:p/>
+          <a:lstStyle/>
+          <a:p>
+            <a:endParaRPr/>
+          </a:p>
         </p:txBody>
       </p:sp>
     </p:spTree>
@@ -15275,10 +15149,10 @@
             </a:pathLst>
           </a:custGeom>
           <a:blipFill>
-            <a:blip>
+            <a:blip r:embed="rId2">
               <a:extLst>
                 <a:ext uri="{96DAC541-7B7A-43D3-8B79-37D633B846F1}">
-                  <asvg:svgBlip xmlns:asvg="http://schemas.microsoft.com/office/drawing/2016/SVG/main" r:embed="rId2"/>
+                  <asvg:svgBlip xmlns:asvg="http://schemas.microsoft.com/office/drawing/2016/SVG/main" r:embed="rId3"/>
                 </a:ext>
               </a:extLst>
             </a:blip>
@@ -15289,7 +15163,10 @@
         </p:spPr>
         <p:txBody>
           <a:bodyPr/>
-          <a:p/>
+          <a:lstStyle/>
+          <a:p>
+            <a:endParaRPr/>
+          </a:p>
         </p:txBody>
       </p:sp>
       <p:sp>
@@ -15331,10 +15208,10 @@
             </a:pathLst>
           </a:custGeom>
           <a:blipFill>
-            <a:blip>
+            <a:blip r:embed="rId2">
               <a:extLst>
                 <a:ext uri="{96DAC541-7B7A-43D3-8B79-37D633B846F1}">
-                  <asvg:svgBlip xmlns:asvg="http://schemas.microsoft.com/office/drawing/2016/SVG/main" r:embed="rId2"/>
+                  <asvg:svgBlip xmlns:asvg="http://schemas.microsoft.com/office/drawing/2016/SVG/main" r:embed="rId3"/>
                 </a:ext>
               </a:extLst>
             </a:blip>
@@ -15345,7 +15222,10 @@
         </p:spPr>
         <p:txBody>
           <a:bodyPr/>
-          <a:p/>
+          <a:lstStyle/>
+          <a:p>
+            <a:endParaRPr/>
+          </a:p>
         </p:txBody>
       </p:sp>
       <p:sp>
@@ -15729,10 +15609,10 @@
             </a:pathLst>
           </a:custGeom>
           <a:blipFill>
-            <a:blip>
+            <a:blip r:embed="rId4">
               <a:extLst>
                 <a:ext uri="{96DAC541-7B7A-43D3-8B79-37D633B846F1}">
-                  <asvg:svgBlip xmlns:asvg="http://schemas.microsoft.com/office/drawing/2016/SVG/main" r:embed="rId3"/>
+                  <asvg:svgBlip xmlns:asvg="http://schemas.microsoft.com/office/drawing/2016/SVG/main" r:embed="rId5"/>
                 </a:ext>
               </a:extLst>
             </a:blip>
@@ -15743,7 +15623,10 @@
         </p:spPr>
         <p:txBody>
           <a:bodyPr/>
-          <a:p/>
+          <a:lstStyle/>
+          <a:p>
+            <a:endParaRPr/>
+          </a:p>
         </p:txBody>
       </p:sp>
       <p:pic>
@@ -15761,7 +15644,7 @@
           <p:nvPr/>
         </p:nvPicPr>
         <p:blipFill>
-          <a:blip r:embed="rId4"/>
+          <a:blip r:embed="rId6"/>
           <a:stretch>
             <a:fillRect/>
           </a:stretch>
@@ -15852,10 +15735,10 @@
             </a:pathLst>
           </a:custGeom>
           <a:blipFill>
-            <a:blip>
+            <a:blip r:embed="rId2">
               <a:extLst>
                 <a:ext uri="{96DAC541-7B7A-43D3-8B79-37D633B846F1}">
-                  <asvg:svgBlip xmlns:asvg="http://schemas.microsoft.com/office/drawing/2016/SVG/main" r:embed="rId2"/>
+                  <asvg:svgBlip xmlns:asvg="http://schemas.microsoft.com/office/drawing/2016/SVG/main" r:embed="rId3"/>
                 </a:ext>
               </a:extLst>
             </a:blip>
@@ -15866,7 +15749,10 @@
         </p:spPr>
         <p:txBody>
           <a:bodyPr/>
-          <a:p/>
+          <a:lstStyle/>
+          <a:p>
+            <a:endParaRPr/>
+          </a:p>
         </p:txBody>
       </p:sp>
       <p:sp>
@@ -15914,10 +15800,10 @@
             </a:pathLst>
           </a:custGeom>
           <a:blipFill>
-            <a:blip>
+            <a:blip r:embed="rId2">
               <a:extLst>
                 <a:ext uri="{96DAC541-7B7A-43D3-8B79-37D633B846F1}">
-                  <asvg:svgBlip xmlns:asvg="http://schemas.microsoft.com/office/drawing/2016/SVG/main" r:embed="rId2"/>
+                  <asvg:svgBlip xmlns:asvg="http://schemas.microsoft.com/office/drawing/2016/SVG/main" r:embed="rId3"/>
                 </a:ext>
               </a:extLst>
             </a:blip>
@@ -15928,7 +15814,10 @@
         </p:spPr>
         <p:txBody>
           <a:bodyPr/>
-          <a:p/>
+          <a:lstStyle/>
+          <a:p>
+            <a:endParaRPr/>
+          </a:p>
         </p:txBody>
       </p:sp>
       <p:sp>
@@ -15976,10 +15865,10 @@
             </a:pathLst>
           </a:custGeom>
           <a:blipFill>
-            <a:blip>
+            <a:blip r:embed="rId2">
               <a:extLst>
                 <a:ext uri="{96DAC541-7B7A-43D3-8B79-37D633B846F1}">
-                  <asvg:svgBlip xmlns:asvg="http://schemas.microsoft.com/office/drawing/2016/SVG/main" r:embed="rId2"/>
+                  <asvg:svgBlip xmlns:asvg="http://schemas.microsoft.com/office/drawing/2016/SVG/main" r:embed="rId3"/>
                 </a:ext>
               </a:extLst>
             </a:blip>
@@ -15990,7 +15879,10 @@
         </p:spPr>
         <p:txBody>
           <a:bodyPr/>
-          <a:p/>
+          <a:lstStyle/>
+          <a:p>
+            <a:endParaRPr/>
+          </a:p>
         </p:txBody>
       </p:sp>
       <p:sp>
@@ -16038,10 +15930,10 @@
             </a:pathLst>
           </a:custGeom>
           <a:blipFill>
-            <a:blip>
+            <a:blip r:embed="rId2">
               <a:extLst>
                 <a:ext uri="{96DAC541-7B7A-43D3-8B79-37D633B846F1}">
-                  <asvg:svgBlip xmlns:asvg="http://schemas.microsoft.com/office/drawing/2016/SVG/main" r:embed="rId2"/>
+                  <asvg:svgBlip xmlns:asvg="http://schemas.microsoft.com/office/drawing/2016/SVG/main" r:embed="rId3"/>
                 </a:ext>
               </a:extLst>
             </a:blip>
@@ -16052,7 +15944,10 @@
         </p:spPr>
         <p:txBody>
           <a:bodyPr/>
-          <a:p/>
+          <a:lstStyle/>
+          <a:p>
+            <a:endParaRPr/>
+          </a:p>
         </p:txBody>
       </p:sp>
       <p:sp>
@@ -16154,7 +16049,7 @@
           <p:nvPr/>
         </p:nvPicPr>
         <p:blipFill>
-          <a:blip r:embed="rId3"/>
+          <a:blip r:embed="rId4"/>
           <a:stretch>
             <a:fillRect/>
           </a:stretch>
@@ -16250,10 +16145,10 @@
             </a:pathLst>
           </a:custGeom>
           <a:blipFill>
-            <a:blip>
+            <a:blip r:embed="rId3">
               <a:extLst>
                 <a:ext uri="{96DAC541-7B7A-43D3-8B79-37D633B846F1}">
-                  <asvg:svgBlip xmlns:asvg="http://schemas.microsoft.com/office/drawing/2016/SVG/main" r:embed="rId3"/>
+                  <asvg:svgBlip xmlns:asvg="http://schemas.microsoft.com/office/drawing/2016/SVG/main" r:embed="rId4"/>
                 </a:ext>
               </a:extLst>
             </a:blip>
@@ -16264,7 +16159,10 @@
         </p:spPr>
         <p:txBody>
           <a:bodyPr/>
-          <a:p/>
+          <a:lstStyle/>
+          <a:p>
+            <a:endParaRPr/>
+          </a:p>
         </p:txBody>
       </p:sp>
       <p:sp>
@@ -16312,10 +16210,10 @@
             </a:pathLst>
           </a:custGeom>
           <a:blipFill>
-            <a:blip>
+            <a:blip r:embed="rId3">
               <a:extLst>
                 <a:ext uri="{96DAC541-7B7A-43D3-8B79-37D633B846F1}">
-                  <asvg:svgBlip xmlns:asvg="http://schemas.microsoft.com/office/drawing/2016/SVG/main" r:embed="rId3"/>
+                  <asvg:svgBlip xmlns:asvg="http://schemas.microsoft.com/office/drawing/2016/SVG/main" r:embed="rId4"/>
                 </a:ext>
               </a:extLst>
             </a:blip>
@@ -16326,7 +16224,10 @@
         </p:spPr>
         <p:txBody>
           <a:bodyPr/>
-          <a:p/>
+          <a:lstStyle/>
+          <a:p>
+            <a:endParaRPr/>
+          </a:p>
         </p:txBody>
       </p:sp>
       <p:sp>
@@ -16374,10 +16275,10 @@
             </a:pathLst>
           </a:custGeom>
           <a:blipFill>
-            <a:blip>
+            <a:blip r:embed="rId3">
               <a:extLst>
                 <a:ext uri="{96DAC541-7B7A-43D3-8B79-37D633B846F1}">
-                  <asvg:svgBlip xmlns:asvg="http://schemas.microsoft.com/office/drawing/2016/SVG/main" r:embed="rId3"/>
+                  <asvg:svgBlip xmlns:asvg="http://schemas.microsoft.com/office/drawing/2016/SVG/main" r:embed="rId4"/>
                 </a:ext>
               </a:extLst>
             </a:blip>
@@ -16388,7 +16289,10 @@
         </p:spPr>
         <p:txBody>
           <a:bodyPr/>
-          <a:p/>
+          <a:lstStyle/>
+          <a:p>
+            <a:endParaRPr/>
+          </a:p>
         </p:txBody>
       </p:sp>
       <p:sp>
@@ -16436,10 +16340,10 @@
             </a:pathLst>
           </a:custGeom>
           <a:blipFill>
-            <a:blip>
+            <a:blip r:embed="rId3">
               <a:extLst>
                 <a:ext uri="{96DAC541-7B7A-43D3-8B79-37D633B846F1}">
-                  <asvg:svgBlip xmlns:asvg="http://schemas.microsoft.com/office/drawing/2016/SVG/main" r:embed="rId3"/>
+                  <asvg:svgBlip xmlns:asvg="http://schemas.microsoft.com/office/drawing/2016/SVG/main" r:embed="rId4"/>
                 </a:ext>
               </a:extLst>
             </a:blip>
@@ -16450,7 +16354,10 @@
         </p:spPr>
         <p:txBody>
           <a:bodyPr/>
-          <a:p/>
+          <a:lstStyle/>
+          <a:p>
+            <a:endParaRPr/>
+          </a:p>
         </p:txBody>
       </p:sp>
       <p:sp>
@@ -16518,7 +16425,7 @@
           <p:nvPr/>
         </p:nvPicPr>
         <p:blipFill>
-          <a:blip r:embed="rId4"/>
+          <a:blip r:embed="rId5"/>
           <a:stretch>
             <a:fillRect/>
           </a:stretch>
@@ -16788,10 +16695,10 @@
             </a:pathLst>
           </a:custGeom>
           <a:blipFill>
-            <a:blip>
+            <a:blip r:embed="rId2">
               <a:extLst>
                 <a:ext uri="{96DAC541-7B7A-43D3-8B79-37D633B846F1}">
-                  <asvg:svgBlip xmlns:asvg="http://schemas.microsoft.com/office/drawing/2016/SVG/main" r:embed="rId2"/>
+                  <asvg:svgBlip xmlns:asvg="http://schemas.microsoft.com/office/drawing/2016/SVG/main" r:embed="rId3"/>
                 </a:ext>
               </a:extLst>
             </a:blip>
@@ -16802,7 +16709,10 @@
         </p:spPr>
         <p:txBody>
           <a:bodyPr/>
-          <a:p/>
+          <a:lstStyle/>
+          <a:p>
+            <a:endParaRPr/>
+          </a:p>
         </p:txBody>
       </p:sp>
       <p:sp>
@@ -16850,10 +16760,10 @@
             </a:pathLst>
           </a:custGeom>
           <a:blipFill>
-            <a:blip>
+            <a:blip r:embed="rId2">
               <a:extLst>
                 <a:ext uri="{96DAC541-7B7A-43D3-8B79-37D633B846F1}">
-                  <asvg:svgBlip xmlns:asvg="http://schemas.microsoft.com/office/drawing/2016/SVG/main" r:embed="rId2"/>
+                  <asvg:svgBlip xmlns:asvg="http://schemas.microsoft.com/office/drawing/2016/SVG/main" r:embed="rId3"/>
                 </a:ext>
               </a:extLst>
             </a:blip>
@@ -16864,7 +16774,10 @@
         </p:spPr>
         <p:txBody>
           <a:bodyPr/>
-          <a:p/>
+          <a:lstStyle/>
+          <a:p>
+            <a:endParaRPr/>
+          </a:p>
         </p:txBody>
       </p:sp>
     </p:spTree>
@@ -17216,10 +17129,10 @@
             </a:pathLst>
           </a:custGeom>
           <a:blipFill>
-            <a:blip>
+            <a:blip r:embed="rId2">
               <a:extLst>
                 <a:ext uri="{96DAC541-7B7A-43D3-8B79-37D633B846F1}">
-                  <asvg:svgBlip xmlns:asvg="http://schemas.microsoft.com/office/drawing/2016/SVG/main" r:embed="rId2"/>
+                  <asvg:svgBlip xmlns:asvg="http://schemas.microsoft.com/office/drawing/2016/SVG/main" r:embed="rId3"/>
                 </a:ext>
               </a:extLst>
             </a:blip>
@@ -17230,7 +17143,10 @@
         </p:spPr>
         <p:txBody>
           <a:bodyPr/>
-          <a:p/>
+          <a:lstStyle/>
+          <a:p>
+            <a:endParaRPr/>
+          </a:p>
         </p:txBody>
       </p:sp>
       <p:sp>
@@ -17278,10 +17194,10 @@
             </a:pathLst>
           </a:custGeom>
           <a:blipFill>
-            <a:blip>
+            <a:blip r:embed="rId2">
               <a:extLst>
                 <a:ext uri="{96DAC541-7B7A-43D3-8B79-37D633B846F1}">
-                  <asvg:svgBlip xmlns:asvg="http://schemas.microsoft.com/office/drawing/2016/SVG/main" r:embed="rId2"/>
+                  <asvg:svgBlip xmlns:asvg="http://schemas.microsoft.com/office/drawing/2016/SVG/main" r:embed="rId3"/>
                 </a:ext>
               </a:extLst>
             </a:blip>
@@ -17292,7 +17208,10 @@
         </p:spPr>
         <p:txBody>
           <a:bodyPr/>
-          <a:p/>
+          <a:lstStyle/>
+          <a:p>
+            <a:endParaRPr/>
+          </a:p>
         </p:txBody>
       </p:sp>
       <p:sp>
@@ -17780,10 +17699,10 @@
             </a:pathLst>
           </a:custGeom>
           <a:blipFill>
-            <a:blip>
+            <a:blip r:embed="rId2">
               <a:extLst>
                 <a:ext uri="{96DAC541-7B7A-43D3-8B79-37D633B846F1}">
-                  <asvg:svgBlip xmlns:asvg="http://schemas.microsoft.com/office/drawing/2016/SVG/main" r:embed="rId2"/>
+                  <asvg:svgBlip xmlns:asvg="http://schemas.microsoft.com/office/drawing/2016/SVG/main" r:embed="rId3"/>
                 </a:ext>
               </a:extLst>
             </a:blip>
@@ -17794,7 +17713,10 @@
         </p:spPr>
         <p:txBody>
           <a:bodyPr/>
-          <a:p/>
+          <a:lstStyle/>
+          <a:p>
+            <a:endParaRPr/>
+          </a:p>
         </p:txBody>
       </p:sp>
       <p:sp>
@@ -17842,10 +17764,10 @@
             </a:pathLst>
           </a:custGeom>
           <a:blipFill>
-            <a:blip>
+            <a:blip r:embed="rId2">
               <a:extLst>
                 <a:ext uri="{96DAC541-7B7A-43D3-8B79-37D633B846F1}">
-                  <asvg:svgBlip xmlns:asvg="http://schemas.microsoft.com/office/drawing/2016/SVG/main" r:embed="rId2"/>
+                  <asvg:svgBlip xmlns:asvg="http://schemas.microsoft.com/office/drawing/2016/SVG/main" r:embed="rId3"/>
                 </a:ext>
               </a:extLst>
             </a:blip>
@@ -17856,7 +17778,10 @@
         </p:spPr>
         <p:txBody>
           <a:bodyPr/>
-          <a:p/>
+          <a:lstStyle/>
+          <a:p>
+            <a:endParaRPr/>
+          </a:p>
         </p:txBody>
       </p:sp>
     </p:spTree>
@@ -18236,10 +18161,10 @@
             </a:pathLst>
           </a:custGeom>
           <a:blipFill>
-            <a:blip>
+            <a:blip r:embed="rId2">
               <a:extLst>
                 <a:ext uri="{96DAC541-7B7A-43D3-8B79-37D633B846F1}">
-                  <asvg:svgBlip xmlns:asvg="http://schemas.microsoft.com/office/drawing/2016/SVG/main" r:embed="rId2"/>
+                  <asvg:svgBlip xmlns:asvg="http://schemas.microsoft.com/office/drawing/2016/SVG/main" r:embed="rId3"/>
                 </a:ext>
               </a:extLst>
             </a:blip>
@@ -18250,7 +18175,10 @@
         </p:spPr>
         <p:txBody>
           <a:bodyPr/>
-          <a:p/>
+          <a:lstStyle/>
+          <a:p>
+            <a:endParaRPr/>
+          </a:p>
         </p:txBody>
       </p:sp>
       <p:sp>
@@ -18298,10 +18226,10 @@
             </a:pathLst>
           </a:custGeom>
           <a:blipFill>
-            <a:blip>
+            <a:blip r:embed="rId2">
               <a:extLst>
                 <a:ext uri="{96DAC541-7B7A-43D3-8B79-37D633B846F1}">
-                  <asvg:svgBlip xmlns:asvg="http://schemas.microsoft.com/office/drawing/2016/SVG/main" r:embed="rId2"/>
+                  <asvg:svgBlip xmlns:asvg="http://schemas.microsoft.com/office/drawing/2016/SVG/main" r:embed="rId3"/>
                 </a:ext>
               </a:extLst>
             </a:blip>
@@ -18312,7 +18240,10 @@
         </p:spPr>
         <p:txBody>
           <a:bodyPr/>
-          <a:p/>
+          <a:lstStyle/>
+          <a:p>
+            <a:endParaRPr/>
+          </a:p>
         </p:txBody>
       </p:sp>
     </p:spTree>
@@ -18673,10 +18604,10 @@
             </a:pathLst>
           </a:custGeom>
           <a:blipFill>
-            <a:blip>
+            <a:blip r:embed="rId2">
               <a:extLst>
                 <a:ext uri="{96DAC541-7B7A-43D3-8B79-37D633B846F1}">
-                  <asvg:svgBlip xmlns:asvg="http://schemas.microsoft.com/office/drawing/2016/SVG/main" r:embed="rId2"/>
+                  <asvg:svgBlip xmlns:asvg="http://schemas.microsoft.com/office/drawing/2016/SVG/main" r:embed="rId3"/>
                 </a:ext>
               </a:extLst>
             </a:blip>
@@ -18687,7 +18618,10 @@
         </p:spPr>
         <p:txBody>
           <a:bodyPr/>
-          <a:p/>
+          <a:lstStyle/>
+          <a:p>
+            <a:endParaRPr/>
+          </a:p>
         </p:txBody>
       </p:sp>
       <p:sp>
@@ -18735,10 +18669,10 @@
             </a:pathLst>
           </a:custGeom>
           <a:blipFill>
-            <a:blip>
+            <a:blip r:embed="rId2">
               <a:extLst>
                 <a:ext uri="{96DAC541-7B7A-43D3-8B79-37D633B846F1}">
-                  <asvg:svgBlip xmlns:asvg="http://schemas.microsoft.com/office/drawing/2016/SVG/main" r:embed="rId2"/>
+                  <asvg:svgBlip xmlns:asvg="http://schemas.microsoft.com/office/drawing/2016/SVG/main" r:embed="rId3"/>
                 </a:ext>
               </a:extLst>
             </a:blip>
@@ -18749,7 +18683,10 @@
         </p:spPr>
         <p:txBody>
           <a:bodyPr/>
-          <a:p/>
+          <a:lstStyle/>
+          <a:p>
+            <a:endParaRPr/>
+          </a:p>
         </p:txBody>
       </p:sp>
     </p:spTree>
@@ -19090,10 +19027,10 @@
             </a:pathLst>
           </a:custGeom>
           <a:blipFill>
-            <a:blip>
+            <a:blip r:embed="rId2">
               <a:extLst>
                 <a:ext uri="{96DAC541-7B7A-43D3-8B79-37D633B846F1}">
-                  <asvg:svgBlip xmlns:asvg="http://schemas.microsoft.com/office/drawing/2016/SVG/main" r:embed="rId2"/>
+                  <asvg:svgBlip xmlns:asvg="http://schemas.microsoft.com/office/drawing/2016/SVG/main" r:embed="rId3"/>
                 </a:ext>
               </a:extLst>
             </a:blip>
@@ -19104,7 +19041,10 @@
         </p:spPr>
         <p:txBody>
           <a:bodyPr/>
-          <a:p/>
+          <a:lstStyle/>
+          <a:p>
+            <a:endParaRPr/>
+          </a:p>
         </p:txBody>
       </p:sp>
       <p:sp>
@@ -19152,10 +19092,10 @@
             </a:pathLst>
           </a:custGeom>
           <a:blipFill>
-            <a:blip>
+            <a:blip r:embed="rId2">
               <a:extLst>
                 <a:ext uri="{96DAC541-7B7A-43D3-8B79-37D633B846F1}">
-                  <asvg:svgBlip xmlns:asvg="http://schemas.microsoft.com/office/drawing/2016/SVG/main" r:embed="rId2"/>
+                  <asvg:svgBlip xmlns:asvg="http://schemas.microsoft.com/office/drawing/2016/SVG/main" r:embed="rId3"/>
                 </a:ext>
               </a:extLst>
             </a:blip>
@@ -19166,7 +19106,10 @@
         </p:spPr>
         <p:txBody>
           <a:bodyPr/>
-          <a:p/>
+          <a:lstStyle/>
+          <a:p>
+            <a:endParaRPr/>
+          </a:p>
         </p:txBody>
       </p:sp>
     </p:spTree>
@@ -19250,10 +19193,10 @@
             </a:pathLst>
           </a:custGeom>
           <a:blipFill>
-            <a:blip>
+            <a:blip r:embed="rId2">
               <a:extLst>
                 <a:ext uri="{96DAC541-7B7A-43D3-8B79-37D633B846F1}">
-                  <asvg:svgBlip xmlns:asvg="http://schemas.microsoft.com/office/drawing/2016/SVG/main" r:embed="rId2"/>
+                  <asvg:svgBlip xmlns:asvg="http://schemas.microsoft.com/office/drawing/2016/SVG/main" r:embed="rId3"/>
                 </a:ext>
               </a:extLst>
             </a:blip>
@@ -19264,7 +19207,10 @@
         </p:spPr>
         <p:txBody>
           <a:bodyPr/>
-          <a:p/>
+          <a:lstStyle/>
+          <a:p>
+            <a:endParaRPr/>
+          </a:p>
         </p:txBody>
       </p:sp>
       <p:sp>
@@ -19312,10 +19258,10 @@
             </a:pathLst>
           </a:custGeom>
           <a:blipFill>
-            <a:blip>
+            <a:blip r:embed="rId2">
               <a:extLst>
                 <a:ext uri="{96DAC541-7B7A-43D3-8B79-37D633B846F1}">
-                  <asvg:svgBlip xmlns:asvg="http://schemas.microsoft.com/office/drawing/2016/SVG/main" r:embed="rId2"/>
+                  <asvg:svgBlip xmlns:asvg="http://schemas.microsoft.com/office/drawing/2016/SVG/main" r:embed="rId3"/>
                 </a:ext>
               </a:extLst>
             </a:blip>
@@ -19326,7 +19272,10 @@
         </p:spPr>
         <p:txBody>
           <a:bodyPr/>
-          <a:p/>
+          <a:lstStyle/>
+          <a:p>
+            <a:endParaRPr/>
+          </a:p>
         </p:txBody>
       </p:sp>
       <p:sp>
@@ -19924,10 +19873,10 @@
             </a:pathLst>
           </a:custGeom>
           <a:blipFill>
-            <a:blip>
+            <a:blip r:embed="rId2">
               <a:extLst>
                 <a:ext uri="{96DAC541-7B7A-43D3-8B79-37D633B846F1}">
-                  <asvg:svgBlip xmlns:asvg="http://schemas.microsoft.com/office/drawing/2016/SVG/main" r:embed="rId2"/>
+                  <asvg:svgBlip xmlns:asvg="http://schemas.microsoft.com/office/drawing/2016/SVG/main" r:embed="rId3"/>
                 </a:ext>
               </a:extLst>
             </a:blip>
@@ -19938,7 +19887,10 @@
         </p:spPr>
         <p:txBody>
           <a:bodyPr/>
-          <a:p/>
+          <a:lstStyle/>
+          <a:p>
+            <a:endParaRPr/>
+          </a:p>
         </p:txBody>
       </p:sp>
       <p:sp>
@@ -19986,10 +19938,10 @@
             </a:pathLst>
           </a:custGeom>
           <a:blipFill>
-            <a:blip>
+            <a:blip r:embed="rId2">
               <a:extLst>
                 <a:ext uri="{96DAC541-7B7A-43D3-8B79-37D633B846F1}">
-                  <asvg:svgBlip xmlns:asvg="http://schemas.microsoft.com/office/drawing/2016/SVG/main" r:embed="rId2"/>
+                  <asvg:svgBlip xmlns:asvg="http://schemas.microsoft.com/office/drawing/2016/SVG/main" r:embed="rId3"/>
                 </a:ext>
               </a:extLst>
             </a:blip>
@@ -20000,7 +19952,10 @@
         </p:spPr>
         <p:txBody>
           <a:bodyPr/>
-          <a:p/>
+          <a:lstStyle/>
+          <a:p>
+            <a:endParaRPr/>
+          </a:p>
         </p:txBody>
       </p:sp>
     </p:spTree>
@@ -20327,10 +20282,10 @@
             </a:pathLst>
           </a:custGeom>
           <a:blipFill>
-            <a:blip>
+            <a:blip r:embed="rId2">
               <a:extLst>
                 <a:ext uri="{96DAC541-7B7A-43D3-8B79-37D633B846F1}">
-                  <asvg:svgBlip xmlns:asvg="http://schemas.microsoft.com/office/drawing/2016/SVG/main" r:embed="rId2"/>
+                  <asvg:svgBlip xmlns:asvg="http://schemas.microsoft.com/office/drawing/2016/SVG/main" r:embed="rId3"/>
                 </a:ext>
               </a:extLst>
             </a:blip>
@@ -20341,7 +20296,10 @@
         </p:spPr>
         <p:txBody>
           <a:bodyPr/>
-          <a:p/>
+          <a:lstStyle/>
+          <a:p>
+            <a:endParaRPr/>
+          </a:p>
         </p:txBody>
       </p:sp>
       <p:sp>
@@ -20389,10 +20347,10 @@
             </a:pathLst>
           </a:custGeom>
           <a:blipFill>
-            <a:blip>
+            <a:blip r:embed="rId2">
               <a:extLst>
                 <a:ext uri="{96DAC541-7B7A-43D3-8B79-37D633B846F1}">
-                  <asvg:svgBlip xmlns:asvg="http://schemas.microsoft.com/office/drawing/2016/SVG/main" r:embed="rId2"/>
+                  <asvg:svgBlip xmlns:asvg="http://schemas.microsoft.com/office/drawing/2016/SVG/main" r:embed="rId3"/>
                 </a:ext>
               </a:extLst>
             </a:blip>
@@ -20403,7 +20361,10 @@
         </p:spPr>
         <p:txBody>
           <a:bodyPr/>
-          <a:p/>
+          <a:lstStyle/>
+          <a:p>
+            <a:endParaRPr/>
+          </a:p>
         </p:txBody>
       </p:sp>
     </p:spTree>
@@ -20695,10 +20656,10 @@
             </a:pathLst>
           </a:custGeom>
           <a:blipFill>
-            <a:blip>
+            <a:blip r:embed="rId2">
               <a:extLst>
                 <a:ext uri="{96DAC541-7B7A-43D3-8B79-37D633B846F1}">
-                  <asvg:svgBlip xmlns:asvg="http://schemas.microsoft.com/office/drawing/2016/SVG/main" r:embed="rId2"/>
+                  <asvg:svgBlip xmlns:asvg="http://schemas.microsoft.com/office/drawing/2016/SVG/main" r:embed="rId3"/>
                 </a:ext>
               </a:extLst>
             </a:blip>
@@ -20709,7 +20670,10 @@
         </p:spPr>
         <p:txBody>
           <a:bodyPr/>
-          <a:p/>
+          <a:lstStyle/>
+          <a:p>
+            <a:endParaRPr/>
+          </a:p>
         </p:txBody>
       </p:sp>
       <p:sp>
@@ -20757,10 +20721,10 @@
             </a:pathLst>
           </a:custGeom>
           <a:blipFill>
-            <a:blip>
+            <a:blip r:embed="rId2">
               <a:extLst>
                 <a:ext uri="{96DAC541-7B7A-43D3-8B79-37D633B846F1}">
-                  <asvg:svgBlip xmlns:asvg="http://schemas.microsoft.com/office/drawing/2016/SVG/main" r:embed="rId2"/>
+                  <asvg:svgBlip xmlns:asvg="http://schemas.microsoft.com/office/drawing/2016/SVG/main" r:embed="rId3"/>
                 </a:ext>
               </a:extLst>
             </a:blip>
@@ -20771,7 +20735,10 @@
         </p:spPr>
         <p:txBody>
           <a:bodyPr/>
-          <a:p/>
+          <a:lstStyle/>
+          <a:p>
+            <a:endParaRPr/>
+          </a:p>
         </p:txBody>
       </p:sp>
     </p:spTree>
@@ -21030,10 +20997,10 @@
             </a:pathLst>
           </a:custGeom>
           <a:blipFill>
-            <a:blip>
+            <a:blip r:embed="rId2">
               <a:extLst>
                 <a:ext uri="{96DAC541-7B7A-43D3-8B79-37D633B846F1}">
-                  <asvg:svgBlip xmlns:asvg="http://schemas.microsoft.com/office/drawing/2016/SVG/main" r:embed="rId2"/>
+                  <asvg:svgBlip xmlns:asvg="http://schemas.microsoft.com/office/drawing/2016/SVG/main" r:embed="rId3"/>
                 </a:ext>
               </a:extLst>
             </a:blip>
@@ -21044,7 +21011,10 @@
         </p:spPr>
         <p:txBody>
           <a:bodyPr/>
-          <a:p/>
+          <a:lstStyle/>
+          <a:p>
+            <a:endParaRPr/>
+          </a:p>
         </p:txBody>
       </p:sp>
       <p:sp>
@@ -21092,10 +21062,10 @@
             </a:pathLst>
           </a:custGeom>
           <a:blipFill>
-            <a:blip>
+            <a:blip r:embed="rId2">
               <a:extLst>
                 <a:ext uri="{96DAC541-7B7A-43D3-8B79-37D633B846F1}">
-                  <asvg:svgBlip xmlns:asvg="http://schemas.microsoft.com/office/drawing/2016/SVG/main" r:embed="rId2"/>
+                  <asvg:svgBlip xmlns:asvg="http://schemas.microsoft.com/office/drawing/2016/SVG/main" r:embed="rId3"/>
                 </a:ext>
               </a:extLst>
             </a:blip>
@@ -21106,7 +21076,10 @@
         </p:spPr>
         <p:txBody>
           <a:bodyPr/>
-          <a:p/>
+          <a:lstStyle/>
+          <a:p>
+            <a:endParaRPr/>
+          </a:p>
         </p:txBody>
       </p:sp>
     </p:spTree>
@@ -21419,10 +21392,10 @@
             </a:pathLst>
           </a:custGeom>
           <a:blipFill>
-            <a:blip>
+            <a:blip r:embed="rId2">
               <a:extLst>
                 <a:ext uri="{96DAC541-7B7A-43D3-8B79-37D633B846F1}">
-                  <asvg:svgBlip xmlns:asvg="http://schemas.microsoft.com/office/drawing/2016/SVG/main" r:embed="rId2"/>
+                  <asvg:svgBlip xmlns:asvg="http://schemas.microsoft.com/office/drawing/2016/SVG/main" r:embed="rId3"/>
                 </a:ext>
               </a:extLst>
             </a:blip>
@@ -21433,7 +21406,10 @@
         </p:spPr>
         <p:txBody>
           <a:bodyPr/>
-          <a:p/>
+          <a:lstStyle/>
+          <a:p>
+            <a:endParaRPr/>
+          </a:p>
         </p:txBody>
       </p:sp>
       <p:sp>
@@ -21481,10 +21457,10 @@
             </a:pathLst>
           </a:custGeom>
           <a:blipFill>
-            <a:blip>
+            <a:blip r:embed="rId2">
               <a:extLst>
                 <a:ext uri="{96DAC541-7B7A-43D3-8B79-37D633B846F1}">
-                  <asvg:svgBlip xmlns:asvg="http://schemas.microsoft.com/office/drawing/2016/SVG/main" r:embed="rId2"/>
+                  <asvg:svgBlip xmlns:asvg="http://schemas.microsoft.com/office/drawing/2016/SVG/main" r:embed="rId3"/>
                 </a:ext>
               </a:extLst>
             </a:blip>
@@ -21495,7 +21471,10 @@
         </p:spPr>
         <p:txBody>
           <a:bodyPr/>
-          <a:p/>
+          <a:lstStyle/>
+          <a:p>
+            <a:endParaRPr/>
+          </a:p>
         </p:txBody>
       </p:sp>
     </p:spTree>
@@ -22649,10 +22628,10 @@
             </a:pathLst>
           </a:custGeom>
           <a:blipFill>
-            <a:blip>
+            <a:blip r:embed="rId2">
               <a:extLst>
                 <a:ext uri="{96DAC541-7B7A-43D3-8B79-37D633B846F1}">
-                  <asvg:svgBlip xmlns:asvg="http://schemas.microsoft.com/office/drawing/2016/SVG/main" r:embed="rId2"/>
+                  <asvg:svgBlip xmlns:asvg="http://schemas.microsoft.com/office/drawing/2016/SVG/main" r:embed="rId3"/>
                 </a:ext>
               </a:extLst>
             </a:blip>
@@ -22663,7 +22642,10 @@
         </p:spPr>
         <p:txBody>
           <a:bodyPr/>
-          <a:p/>
+          <a:lstStyle/>
+          <a:p>
+            <a:endParaRPr/>
+          </a:p>
         </p:txBody>
       </p:sp>
       <p:sp>
@@ -22711,10 +22693,10 @@
             </a:pathLst>
           </a:custGeom>
           <a:blipFill>
-            <a:blip>
+            <a:blip r:embed="rId2">
               <a:extLst>
                 <a:ext uri="{96DAC541-7B7A-43D3-8B79-37D633B846F1}">
-                  <asvg:svgBlip xmlns:asvg="http://schemas.microsoft.com/office/drawing/2016/SVG/main" r:embed="rId2"/>
+                  <asvg:svgBlip xmlns:asvg="http://schemas.microsoft.com/office/drawing/2016/SVG/main" r:embed="rId3"/>
                 </a:ext>
               </a:extLst>
             </a:blip>
@@ -22725,7 +22707,10 @@
         </p:spPr>
         <p:txBody>
           <a:bodyPr/>
-          <a:p/>
+          <a:lstStyle/>
+          <a:p>
+            <a:endParaRPr/>
+          </a:p>
         </p:txBody>
       </p:sp>
     </p:spTree>
@@ -23042,10 +23027,10 @@
             </a:pathLst>
           </a:custGeom>
           <a:blipFill>
-            <a:blip>
+            <a:blip r:embed="rId2">
               <a:extLst>
                 <a:ext uri="{96DAC541-7B7A-43D3-8B79-37D633B846F1}">
-                  <asvg:svgBlip xmlns:asvg="http://schemas.microsoft.com/office/drawing/2016/SVG/main" r:embed="rId2"/>
+                  <asvg:svgBlip xmlns:asvg="http://schemas.microsoft.com/office/drawing/2016/SVG/main" r:embed="rId3"/>
                 </a:ext>
               </a:extLst>
             </a:blip>
@@ -23056,7 +23041,10 @@
         </p:spPr>
         <p:txBody>
           <a:bodyPr/>
-          <a:p/>
+          <a:lstStyle/>
+          <a:p>
+            <a:endParaRPr/>
+          </a:p>
         </p:txBody>
       </p:sp>
     </p:spTree>
@@ -23353,10 +23341,10 @@
             </a:pathLst>
           </a:custGeom>
           <a:blipFill>
-            <a:blip>
+            <a:blip r:embed="rId2">
               <a:extLst>
                 <a:ext uri="{96DAC541-7B7A-43D3-8B79-37D633B846F1}">
-                  <asvg:svgBlip xmlns:asvg="http://schemas.microsoft.com/office/drawing/2016/SVG/main" r:embed="rId2"/>
+                  <asvg:svgBlip xmlns:asvg="http://schemas.microsoft.com/office/drawing/2016/SVG/main" r:embed="rId3"/>
                 </a:ext>
               </a:extLst>
             </a:blip>
@@ -23367,7 +23355,10 @@
         </p:spPr>
         <p:txBody>
           <a:bodyPr/>
-          <a:p/>
+          <a:lstStyle/>
+          <a:p>
+            <a:endParaRPr/>
+          </a:p>
         </p:txBody>
       </p:sp>
       <p:sp>
@@ -23415,10 +23406,10 @@
             </a:pathLst>
           </a:custGeom>
           <a:blipFill>
-            <a:blip>
+            <a:blip r:embed="rId2">
               <a:extLst>
                 <a:ext uri="{96DAC541-7B7A-43D3-8B79-37D633B846F1}">
-                  <asvg:svgBlip xmlns:asvg="http://schemas.microsoft.com/office/drawing/2016/SVG/main" r:embed="rId2"/>
+                  <asvg:svgBlip xmlns:asvg="http://schemas.microsoft.com/office/drawing/2016/SVG/main" r:embed="rId3"/>
                 </a:ext>
               </a:extLst>
             </a:blip>
@@ -23429,7 +23420,10 @@
         </p:spPr>
         <p:txBody>
           <a:bodyPr/>
-          <a:p/>
+          <a:lstStyle/>
+          <a:p>
+            <a:endParaRPr/>
+          </a:p>
         </p:txBody>
       </p:sp>
     </p:spTree>
@@ -23756,10 +23750,10 @@
             </a:pathLst>
           </a:custGeom>
           <a:blipFill>
-            <a:blip>
+            <a:blip r:embed="rId2">
               <a:extLst>
                 <a:ext uri="{96DAC541-7B7A-43D3-8B79-37D633B846F1}">
-                  <asvg:svgBlip xmlns:asvg="http://schemas.microsoft.com/office/drawing/2016/SVG/main" r:embed="rId2"/>
+                  <asvg:svgBlip xmlns:asvg="http://schemas.microsoft.com/office/drawing/2016/SVG/main" r:embed="rId3"/>
                 </a:ext>
               </a:extLst>
             </a:blip>
@@ -23770,7 +23764,10 @@
         </p:spPr>
         <p:txBody>
           <a:bodyPr/>
-          <a:p/>
+          <a:lstStyle/>
+          <a:p>
+            <a:endParaRPr/>
+          </a:p>
         </p:txBody>
       </p:sp>
       <p:sp>
@@ -23818,10 +23815,10 @@
             </a:pathLst>
           </a:custGeom>
           <a:blipFill>
-            <a:blip>
+            <a:blip r:embed="rId2">
               <a:extLst>
                 <a:ext uri="{96DAC541-7B7A-43D3-8B79-37D633B846F1}">
-                  <asvg:svgBlip xmlns:asvg="http://schemas.microsoft.com/office/drawing/2016/SVG/main" r:embed="rId2"/>
+                  <asvg:svgBlip xmlns:asvg="http://schemas.microsoft.com/office/drawing/2016/SVG/main" r:embed="rId3"/>
                 </a:ext>
               </a:extLst>
             </a:blip>
@@ -23832,7 +23829,10 @@
         </p:spPr>
         <p:txBody>
           <a:bodyPr/>
-          <a:p/>
+          <a:lstStyle/>
+          <a:p>
+            <a:endParaRPr/>
+          </a:p>
         </p:txBody>
       </p:sp>
     </p:spTree>
@@ -24114,10 +24114,10 @@
             </a:pathLst>
           </a:custGeom>
           <a:blipFill>
-            <a:blip>
+            <a:blip r:embed="rId2">
               <a:extLst>
                 <a:ext uri="{96DAC541-7B7A-43D3-8B79-37D633B846F1}">
-                  <asvg:svgBlip xmlns:asvg="http://schemas.microsoft.com/office/drawing/2016/SVG/main" r:embed="rId2"/>
+                  <asvg:svgBlip xmlns:asvg="http://schemas.microsoft.com/office/drawing/2016/SVG/main" r:embed="rId3"/>
                 </a:ext>
               </a:extLst>
             </a:blip>
@@ -24128,7 +24128,10 @@
         </p:spPr>
         <p:txBody>
           <a:bodyPr/>
-          <a:p/>
+          <a:lstStyle/>
+          <a:p>
+            <a:endParaRPr/>
+          </a:p>
         </p:txBody>
       </p:sp>
       <p:sp>
@@ -24176,10 +24179,10 @@
             </a:pathLst>
           </a:custGeom>
           <a:blipFill>
-            <a:blip>
+            <a:blip r:embed="rId2">
               <a:extLst>
                 <a:ext uri="{96DAC541-7B7A-43D3-8B79-37D633B846F1}">
-                  <asvg:svgBlip xmlns:asvg="http://schemas.microsoft.com/office/drawing/2016/SVG/main" r:embed="rId2"/>
+                  <asvg:svgBlip xmlns:asvg="http://schemas.microsoft.com/office/drawing/2016/SVG/main" r:embed="rId3"/>
                 </a:ext>
               </a:extLst>
             </a:blip>
@@ -24190,7 +24193,10 @@
         </p:spPr>
         <p:txBody>
           <a:bodyPr/>
-          <a:p/>
+          <a:lstStyle/>
+          <a:p>
+            <a:endParaRPr/>
+          </a:p>
         </p:txBody>
       </p:sp>
     </p:spTree>
@@ -24257,10 +24263,10 @@
             </a:pathLst>
           </a:custGeom>
           <a:blipFill>
-            <a:blip>
+            <a:blip r:embed="rId2">
               <a:extLst>
                 <a:ext uri="{96DAC541-7B7A-43D3-8B79-37D633B846F1}">
-                  <asvg:svgBlip xmlns:asvg="http://schemas.microsoft.com/office/drawing/2016/SVG/main" r:embed="rId2"/>
+                  <asvg:svgBlip xmlns:asvg="http://schemas.microsoft.com/office/drawing/2016/SVG/main" r:embed="rId3"/>
                 </a:ext>
               </a:extLst>
             </a:blip>
@@ -24271,7 +24277,10 @@
         </p:spPr>
         <p:txBody>
           <a:bodyPr/>
-          <a:p/>
+          <a:lstStyle/>
+          <a:p>
+            <a:endParaRPr/>
+          </a:p>
         </p:txBody>
       </p:sp>
       <p:sp>
@@ -24313,10 +24322,10 @@
             </a:pathLst>
           </a:custGeom>
           <a:blipFill>
-            <a:blip>
+            <a:blip r:embed="rId2">
               <a:extLst>
                 <a:ext uri="{96DAC541-7B7A-43D3-8B79-37D633B846F1}">
-                  <asvg:svgBlip xmlns:asvg="http://schemas.microsoft.com/office/drawing/2016/SVG/main" r:embed="rId2"/>
+                  <asvg:svgBlip xmlns:asvg="http://schemas.microsoft.com/office/drawing/2016/SVG/main" r:embed="rId3"/>
                 </a:ext>
               </a:extLst>
             </a:blip>
@@ -24327,7 +24336,10 @@
         </p:spPr>
         <p:txBody>
           <a:bodyPr/>
-          <a:p/>
+          <a:lstStyle/>
+          <a:p>
+            <a:endParaRPr/>
+          </a:p>
         </p:txBody>
       </p:sp>
       <p:sp>
@@ -24609,10 +24621,10 @@
             </a:pathLst>
           </a:custGeom>
           <a:blipFill>
-            <a:blip>
+            <a:blip r:embed="rId4">
               <a:extLst>
                 <a:ext uri="{96DAC541-7B7A-43D3-8B79-37D633B846F1}">
-                  <asvg:svgBlip xmlns:asvg="http://schemas.microsoft.com/office/drawing/2016/SVG/main" r:embed="rId3"/>
+                  <asvg:svgBlip xmlns:asvg="http://schemas.microsoft.com/office/drawing/2016/SVG/main" r:embed="rId5"/>
                 </a:ext>
               </a:extLst>
             </a:blip>
@@ -24623,7 +24635,10 @@
         </p:spPr>
         <p:txBody>
           <a:bodyPr/>
-          <a:p/>
+          <a:lstStyle/>
+          <a:p>
+            <a:endParaRPr/>
+          </a:p>
         </p:txBody>
       </p:sp>
     </p:spTree>
@@ -24702,10 +24717,10 @@
             </a:pathLst>
           </a:custGeom>
           <a:blipFill>
-            <a:blip>
+            <a:blip r:embed="rId2">
               <a:extLst>
                 <a:ext uri="{96DAC541-7B7A-43D3-8B79-37D633B846F1}">
-                  <asvg:svgBlip xmlns:asvg="http://schemas.microsoft.com/office/drawing/2016/SVG/main" r:embed="rId2"/>
+                  <asvg:svgBlip xmlns:asvg="http://schemas.microsoft.com/office/drawing/2016/SVG/main" r:embed="rId3"/>
                 </a:ext>
               </a:extLst>
             </a:blip>
@@ -24716,7 +24731,10 @@
         </p:spPr>
         <p:txBody>
           <a:bodyPr/>
-          <a:p/>
+          <a:lstStyle/>
+          <a:p>
+            <a:endParaRPr/>
+          </a:p>
         </p:txBody>
       </p:sp>
       <p:sp>
@@ -24764,10 +24782,10 @@
             </a:pathLst>
           </a:custGeom>
           <a:blipFill>
-            <a:blip>
+            <a:blip r:embed="rId2">
               <a:extLst>
                 <a:ext uri="{96DAC541-7B7A-43D3-8B79-37D633B846F1}">
-                  <asvg:svgBlip xmlns:asvg="http://schemas.microsoft.com/office/drawing/2016/SVG/main" r:embed="rId2"/>
+                  <asvg:svgBlip xmlns:asvg="http://schemas.microsoft.com/office/drawing/2016/SVG/main" r:embed="rId3"/>
                 </a:ext>
               </a:extLst>
             </a:blip>
@@ -24778,7 +24796,10 @@
         </p:spPr>
         <p:txBody>
           <a:bodyPr/>
-          <a:p/>
+          <a:lstStyle/>
+          <a:p>
+            <a:endParaRPr/>
+          </a:p>
         </p:txBody>
       </p:sp>
       <p:sp>
@@ -24924,10 +24945,10 @@
             </a:pathLst>
           </a:custGeom>
           <a:blipFill>
-            <a:blip>
+            <a:blip r:embed="rId4">
               <a:extLst>
                 <a:ext uri="{96DAC541-7B7A-43D3-8B79-37D633B846F1}">
-                  <asvg:svgBlip xmlns:asvg="http://schemas.microsoft.com/office/drawing/2016/SVG/main" r:embed="rId3"/>
+                  <asvg:svgBlip xmlns:asvg="http://schemas.microsoft.com/office/drawing/2016/SVG/main" r:embed="rId5"/>
                 </a:ext>
               </a:extLst>
             </a:blip>
@@ -24938,7 +24959,10 @@
         </p:spPr>
         <p:txBody>
           <a:bodyPr/>
-          <a:p/>
+          <a:lstStyle/>
+          <a:p>
+            <a:endParaRPr/>
+          </a:p>
         </p:txBody>
       </p:sp>
       <p:pic>
@@ -24956,7 +24980,7 @@
           <p:nvPr/>
         </p:nvPicPr>
         <p:blipFill>
-          <a:blip r:embed="rId4"/>
+          <a:blip r:embed="rId6"/>
           <a:stretch>
             <a:fillRect/>
           </a:stretch>
@@ -25052,10 +25076,10 @@
             </a:pathLst>
           </a:custGeom>
           <a:blipFill>
-            <a:blip>
+            <a:blip r:embed="rId2">
               <a:extLst>
                 <a:ext uri="{96DAC541-7B7A-43D3-8B79-37D633B846F1}">
-                  <asvg:svgBlip xmlns:asvg="http://schemas.microsoft.com/office/drawing/2016/SVG/main" r:embed="rId2"/>
+                  <asvg:svgBlip xmlns:asvg="http://schemas.microsoft.com/office/drawing/2016/SVG/main" r:embed="rId3"/>
                 </a:ext>
               </a:extLst>
             </a:blip>
@@ -25066,7 +25090,10 @@
         </p:spPr>
         <p:txBody>
           <a:bodyPr/>
-          <a:p/>
+          <a:lstStyle/>
+          <a:p>
+            <a:endParaRPr/>
+          </a:p>
         </p:txBody>
       </p:sp>
       <p:sp>
@@ -25114,10 +25141,10 @@
             </a:pathLst>
           </a:custGeom>
           <a:blipFill>
-            <a:blip>
+            <a:blip r:embed="rId2">
               <a:extLst>
                 <a:ext uri="{96DAC541-7B7A-43D3-8B79-37D633B846F1}">
-                  <asvg:svgBlip xmlns:asvg="http://schemas.microsoft.com/office/drawing/2016/SVG/main" r:embed="rId2"/>
+                  <asvg:svgBlip xmlns:asvg="http://schemas.microsoft.com/office/drawing/2016/SVG/main" r:embed="rId3"/>
                 </a:ext>
               </a:extLst>
             </a:blip>
@@ -25128,7 +25155,10 @@
         </p:spPr>
         <p:txBody>
           <a:bodyPr/>
-          <a:p/>
+          <a:lstStyle/>
+          <a:p>
+            <a:endParaRPr/>
+          </a:p>
         </p:txBody>
       </p:sp>
       <p:sp>
@@ -25274,10 +25304,10 @@
             </a:pathLst>
           </a:custGeom>
           <a:blipFill>
-            <a:blip>
+            <a:blip r:embed="rId4">
               <a:extLst>
                 <a:ext uri="{96DAC541-7B7A-43D3-8B79-37D633B846F1}">
-                  <asvg:svgBlip xmlns:asvg="http://schemas.microsoft.com/office/drawing/2016/SVG/main" r:embed="rId3"/>
+                  <asvg:svgBlip xmlns:asvg="http://schemas.microsoft.com/office/drawing/2016/SVG/main" r:embed="rId5"/>
                 </a:ext>
               </a:extLst>
             </a:blip>
@@ -25288,7 +25318,10 @@
         </p:spPr>
         <p:txBody>
           <a:bodyPr/>
-          <a:p/>
+          <a:lstStyle/>
+          <a:p>
+            <a:endParaRPr/>
+          </a:p>
         </p:txBody>
       </p:sp>
       <p:pic>
@@ -25306,7 +25339,7 @@
           <p:nvPr/>
         </p:nvPicPr>
         <p:blipFill>
-          <a:blip r:embed="rId4"/>
+          <a:blip r:embed="rId6"/>
           <a:stretch>
             <a:fillRect/>
           </a:stretch>
@@ -25402,10 +25435,10 @@
             </a:pathLst>
           </a:custGeom>
           <a:blipFill>
-            <a:blip>
+            <a:blip r:embed="rId2">
               <a:extLst>
                 <a:ext uri="{96DAC541-7B7A-43D3-8B79-37D633B846F1}">
-                  <asvg:svgBlip xmlns:asvg="http://schemas.microsoft.com/office/drawing/2016/SVG/main" r:embed="rId2"/>
+                  <asvg:svgBlip xmlns:asvg="http://schemas.microsoft.com/office/drawing/2016/SVG/main" r:embed="rId3"/>
                 </a:ext>
               </a:extLst>
             </a:blip>
@@ -25416,7 +25449,10 @@
         </p:spPr>
         <p:txBody>
           <a:bodyPr/>
-          <a:p/>
+          <a:lstStyle/>
+          <a:p>
+            <a:endParaRPr/>
+          </a:p>
         </p:txBody>
       </p:sp>
       <p:sp>
@@ -25464,10 +25500,10 @@
             </a:pathLst>
           </a:custGeom>
           <a:blipFill>
-            <a:blip>
+            <a:blip r:embed="rId2">
               <a:extLst>
                 <a:ext uri="{96DAC541-7B7A-43D3-8B79-37D633B846F1}">
-                  <asvg:svgBlip xmlns:asvg="http://schemas.microsoft.com/office/drawing/2016/SVG/main" r:embed="rId2"/>
+                  <asvg:svgBlip xmlns:asvg="http://schemas.microsoft.com/office/drawing/2016/SVG/main" r:embed="rId3"/>
                 </a:ext>
               </a:extLst>
             </a:blip>
@@ -25478,7 +25514,10 @@
         </p:spPr>
         <p:txBody>
           <a:bodyPr/>
-          <a:p/>
+          <a:lstStyle/>
+          <a:p>
+            <a:endParaRPr/>
+          </a:p>
         </p:txBody>
       </p:sp>
       <p:sp>
@@ -25624,10 +25663,10 @@
             </a:pathLst>
           </a:custGeom>
           <a:blipFill>
-            <a:blip>
+            <a:blip r:embed="rId4">
               <a:extLst>
                 <a:ext uri="{96DAC541-7B7A-43D3-8B79-37D633B846F1}">
-                  <asvg:svgBlip xmlns:asvg="http://schemas.microsoft.com/office/drawing/2016/SVG/main" r:embed="rId3"/>
+                  <asvg:svgBlip xmlns:asvg="http://schemas.microsoft.com/office/drawing/2016/SVG/main" r:embed="rId5"/>
                 </a:ext>
               </a:extLst>
             </a:blip>
@@ -25638,7 +25677,10 @@
         </p:spPr>
         <p:txBody>
           <a:bodyPr/>
-          <a:p/>
+          <a:lstStyle/>
+          <a:p>
+            <a:endParaRPr/>
+          </a:p>
         </p:txBody>
       </p:sp>
       <p:pic>
@@ -25656,7 +25698,7 @@
           <p:nvPr/>
         </p:nvPicPr>
         <p:blipFill>
-          <a:blip r:embed="rId4"/>
+          <a:blip r:embed="rId6"/>
           <a:stretch>
             <a:fillRect/>
           </a:stretch>
@@ -25752,10 +25794,10 @@
             </a:pathLst>
           </a:custGeom>
           <a:blipFill>
-            <a:blip>
+            <a:blip r:embed="rId2">
               <a:extLst>
                 <a:ext uri="{96DAC541-7B7A-43D3-8B79-37D633B846F1}">
-                  <asvg:svgBlip xmlns:asvg="http://schemas.microsoft.com/office/drawing/2016/SVG/main" r:embed="rId2"/>
+                  <asvg:svgBlip xmlns:asvg="http://schemas.microsoft.com/office/drawing/2016/SVG/main" r:embed="rId3"/>
                 </a:ext>
               </a:extLst>
             </a:blip>
@@ -25766,7 +25808,10 @@
         </p:spPr>
         <p:txBody>
           <a:bodyPr/>
-          <a:p/>
+          <a:lstStyle/>
+          <a:p>
+            <a:endParaRPr/>
+          </a:p>
         </p:txBody>
       </p:sp>
       <p:sp>
@@ -25814,10 +25859,10 @@
             </a:pathLst>
           </a:custGeom>
           <a:blipFill>
-            <a:blip>
+            <a:blip r:embed="rId2">
               <a:extLst>
                 <a:ext uri="{96DAC541-7B7A-43D3-8B79-37D633B846F1}">
-                  <asvg:svgBlip xmlns:asvg="http://schemas.microsoft.com/office/drawing/2016/SVG/main" r:embed="rId2"/>
+                  <asvg:svgBlip xmlns:asvg="http://schemas.microsoft.com/office/drawing/2016/SVG/main" r:embed="rId3"/>
                 </a:ext>
               </a:extLst>
             </a:blip>
@@ -25828,7 +25873,10 @@
         </p:spPr>
         <p:txBody>
           <a:bodyPr/>
-          <a:p/>
+          <a:lstStyle/>
+          <a:p>
+            <a:endParaRPr/>
+          </a:p>
         </p:txBody>
       </p:sp>
       <p:sp>
@@ -25958,10 +26006,10 @@
             </a:pathLst>
           </a:custGeom>
           <a:blipFill>
-            <a:blip>
+            <a:blip r:embed="rId4">
               <a:extLst>
                 <a:ext uri="{96DAC541-7B7A-43D3-8B79-37D633B846F1}">
-                  <asvg:svgBlip xmlns:asvg="http://schemas.microsoft.com/office/drawing/2016/SVG/main" r:embed="rId3"/>
+                  <asvg:svgBlip xmlns:asvg="http://schemas.microsoft.com/office/drawing/2016/SVG/main" r:embed="rId5"/>
                 </a:ext>
               </a:extLst>
             </a:blip>
@@ -25972,7 +26020,10 @@
         </p:spPr>
         <p:txBody>
           <a:bodyPr/>
-          <a:p/>
+          <a:lstStyle/>
+          <a:p>
+            <a:endParaRPr/>
+          </a:p>
         </p:txBody>
       </p:sp>
       <p:pic>
@@ -25990,7 +26041,7 @@
           <p:nvPr/>
         </p:nvPicPr>
         <p:blipFill>
-          <a:blip r:embed="rId4"/>
+          <a:blip r:embed="rId6"/>
           <a:stretch>
             <a:fillRect/>
           </a:stretch>
@@ -26086,10 +26137,10 @@
             </a:pathLst>
           </a:custGeom>
           <a:blipFill>
-            <a:blip>
+            <a:blip r:embed="rId2">
               <a:extLst>
                 <a:ext uri="{96DAC541-7B7A-43D3-8B79-37D633B846F1}">
-                  <asvg:svgBlip xmlns:asvg="http://schemas.microsoft.com/office/drawing/2016/SVG/main" r:embed="rId2"/>
+                  <asvg:svgBlip xmlns:asvg="http://schemas.microsoft.com/office/drawing/2016/SVG/main" r:embed="rId3"/>
                 </a:ext>
               </a:extLst>
             </a:blip>
@@ -26100,7 +26151,10 @@
         </p:spPr>
         <p:txBody>
           <a:bodyPr/>
-          <a:p/>
+          <a:lstStyle/>
+          <a:p>
+            <a:endParaRPr/>
+          </a:p>
         </p:txBody>
       </p:sp>
       <p:sp>
@@ -26148,10 +26202,10 @@
             </a:pathLst>
           </a:custGeom>
           <a:blipFill>
-            <a:blip>
+            <a:blip r:embed="rId2">
               <a:extLst>
                 <a:ext uri="{96DAC541-7B7A-43D3-8B79-37D633B846F1}">
-                  <asvg:svgBlip xmlns:asvg="http://schemas.microsoft.com/office/drawing/2016/SVG/main" r:embed="rId2"/>
+                  <asvg:svgBlip xmlns:asvg="http://schemas.microsoft.com/office/drawing/2016/SVG/main" r:embed="rId3"/>
                 </a:ext>
               </a:extLst>
             </a:blip>
@@ -26162,7 +26216,10 @@
         </p:spPr>
         <p:txBody>
           <a:bodyPr/>
-          <a:p/>
+          <a:lstStyle/>
+          <a:p>
+            <a:endParaRPr/>
+          </a:p>
         </p:txBody>
       </p:sp>
       <p:sp>
@@ -26453,10 +26510,10 @@
             </a:pathLst>
           </a:custGeom>
           <a:blipFill>
-            <a:blip>
+            <a:blip r:embed="rId4">
               <a:extLst>
                 <a:ext uri="{96DAC541-7B7A-43D3-8B79-37D633B846F1}">
-                  <asvg:svgBlip xmlns:asvg="http://schemas.microsoft.com/office/drawing/2016/SVG/main" r:embed="rId3"/>
+                  <asvg:svgBlip xmlns:asvg="http://schemas.microsoft.com/office/drawing/2016/SVG/main" r:embed="rId5"/>
                 </a:ext>
               </a:extLst>
             </a:blip>
@@ -26467,7 +26524,10 @@
         </p:spPr>
         <p:txBody>
           <a:bodyPr/>
-          <a:p/>
+          <a:lstStyle/>
+          <a:p>
+            <a:endParaRPr/>
+          </a:p>
         </p:txBody>
       </p:sp>
     </p:spTree>
@@ -26551,10 +26611,10 @@
             </a:pathLst>
           </a:custGeom>
           <a:blipFill>
-            <a:blip>
+            <a:blip r:embed="rId2">
               <a:extLst>
                 <a:ext uri="{96DAC541-7B7A-43D3-8B79-37D633B846F1}">
-                  <asvg:svgBlip xmlns:asvg="http://schemas.microsoft.com/office/drawing/2016/SVG/main" r:embed="rId2"/>
+                  <asvg:svgBlip xmlns:asvg="http://schemas.microsoft.com/office/drawing/2016/SVG/main" r:embed="rId3"/>
                 </a:ext>
               </a:extLst>
             </a:blip>
@@ -26565,7 +26625,10 @@
         </p:spPr>
         <p:txBody>
           <a:bodyPr/>
-          <a:p/>
+          <a:lstStyle/>
+          <a:p>
+            <a:endParaRPr/>
+          </a:p>
         </p:txBody>
       </p:sp>
       <p:sp>
@@ -26613,10 +26676,10 @@
             </a:pathLst>
           </a:custGeom>
           <a:blipFill>
-            <a:blip>
+            <a:blip r:embed="rId2">
               <a:extLst>
                 <a:ext uri="{96DAC541-7B7A-43D3-8B79-37D633B846F1}">
-                  <asvg:svgBlip xmlns:asvg="http://schemas.microsoft.com/office/drawing/2016/SVG/main" r:embed="rId2"/>
+                  <asvg:svgBlip xmlns:asvg="http://schemas.microsoft.com/office/drawing/2016/SVG/main" r:embed="rId3"/>
                 </a:ext>
               </a:extLst>
             </a:blip>
@@ -26627,7 +26690,10 @@
         </p:spPr>
         <p:txBody>
           <a:bodyPr/>
-          <a:p/>
+          <a:lstStyle/>
+          <a:p>
+            <a:endParaRPr/>
+          </a:p>
         </p:txBody>
       </p:sp>
       <p:sp>
@@ -26860,10 +26926,10 @@
             </a:pathLst>
           </a:custGeom>
           <a:blipFill>
-            <a:blip>
+            <a:blip r:embed="rId4">
               <a:extLst>
                 <a:ext uri="{96DAC541-7B7A-43D3-8B79-37D633B846F1}">
-                  <asvg:svgBlip xmlns:asvg="http://schemas.microsoft.com/office/drawing/2016/SVG/main" r:embed="rId3"/>
+                  <asvg:svgBlip xmlns:asvg="http://schemas.microsoft.com/office/drawing/2016/SVG/main" r:embed="rId5"/>
                 </a:ext>
               </a:extLst>
             </a:blip>
@@ -26874,7 +26940,10 @@
         </p:spPr>
         <p:txBody>
           <a:bodyPr/>
-          <a:p/>
+          <a:lstStyle/>
+          <a:p>
+            <a:endParaRPr/>
+          </a:p>
         </p:txBody>
       </p:sp>
     </p:spTree>
@@ -26958,10 +27027,10 @@
             </a:pathLst>
           </a:custGeom>
           <a:blipFill>
-            <a:blip>
+            <a:blip r:embed="rId2">
               <a:extLst>
                 <a:ext uri="{96DAC541-7B7A-43D3-8B79-37D633B846F1}">
-                  <asvg:svgBlip xmlns:asvg="http://schemas.microsoft.com/office/drawing/2016/SVG/main" r:embed="rId2"/>
+                  <asvg:svgBlip xmlns:asvg="http://schemas.microsoft.com/office/drawing/2016/SVG/main" r:embed="rId3"/>
                 </a:ext>
               </a:extLst>
             </a:blip>
@@ -26972,7 +27041,10 @@
         </p:spPr>
         <p:txBody>
           <a:bodyPr/>
-          <a:p/>
+          <a:lstStyle/>
+          <a:p>
+            <a:endParaRPr/>
+          </a:p>
         </p:txBody>
       </p:sp>
       <p:sp>
@@ -27020,10 +27092,10 @@
             </a:pathLst>
           </a:custGeom>
           <a:blipFill>
-            <a:blip>
+            <a:blip r:embed="rId2">
               <a:extLst>
                 <a:ext uri="{96DAC541-7B7A-43D3-8B79-37D633B846F1}">
-                  <asvg:svgBlip xmlns:asvg="http://schemas.microsoft.com/office/drawing/2016/SVG/main" r:embed="rId2"/>
+                  <asvg:svgBlip xmlns:asvg="http://schemas.microsoft.com/office/drawing/2016/SVG/main" r:embed="rId3"/>
                 </a:ext>
               </a:extLst>
             </a:blip>
@@ -27034,7 +27106,10 @@
         </p:spPr>
         <p:txBody>
           <a:bodyPr/>
-          <a:p/>
+          <a:lstStyle/>
+          <a:p>
+            <a:endParaRPr/>
+          </a:p>
         </p:txBody>
       </p:sp>
       <p:sp>
@@ -27245,10 +27320,10 @@
             </a:pathLst>
           </a:custGeom>
           <a:blipFill>
-            <a:blip>
+            <a:blip r:embed="rId2">
               <a:extLst>
                 <a:ext uri="{96DAC541-7B7A-43D3-8B79-37D633B846F1}">
-                  <asvg:svgBlip xmlns:asvg="http://schemas.microsoft.com/office/drawing/2016/SVG/main" r:embed="rId2"/>
+                  <asvg:svgBlip xmlns:asvg="http://schemas.microsoft.com/office/drawing/2016/SVG/main" r:embed="rId3"/>
                 </a:ext>
               </a:extLst>
             </a:blip>
@@ -27259,7 +27334,10 @@
         </p:spPr>
         <p:txBody>
           <a:bodyPr/>
-          <a:p/>
+          <a:lstStyle/>
+          <a:p>
+            <a:endParaRPr/>
+          </a:p>
         </p:txBody>
       </p:sp>
       <p:sp>
@@ -27301,10 +27379,10 @@
             </a:pathLst>
           </a:custGeom>
           <a:blipFill>
-            <a:blip>
+            <a:blip r:embed="rId2">
               <a:extLst>
                 <a:ext uri="{96DAC541-7B7A-43D3-8B79-37D633B846F1}">
-                  <asvg:svgBlip xmlns:asvg="http://schemas.microsoft.com/office/drawing/2016/SVG/main" r:embed="rId2"/>
+                  <asvg:svgBlip xmlns:asvg="http://schemas.microsoft.com/office/drawing/2016/SVG/main" r:embed="rId3"/>
                 </a:ext>
               </a:extLst>
             </a:blip>
@@ -27315,7 +27393,10 @@
         </p:spPr>
         <p:txBody>
           <a:bodyPr/>
-          <a:p/>
+          <a:lstStyle/>
+          <a:p>
+            <a:endParaRPr/>
+          </a:p>
         </p:txBody>
       </p:sp>
       <p:sp>
@@ -27357,10 +27438,10 @@
             </a:pathLst>
           </a:custGeom>
           <a:blipFill>
-            <a:blip>
+            <a:blip r:embed="rId2">
               <a:extLst>
                 <a:ext uri="{96DAC541-7B7A-43D3-8B79-37D633B846F1}">
-                  <asvg:svgBlip xmlns:asvg="http://schemas.microsoft.com/office/drawing/2016/SVG/main" r:embed="rId2"/>
+                  <asvg:svgBlip xmlns:asvg="http://schemas.microsoft.com/office/drawing/2016/SVG/main" r:embed="rId3"/>
                 </a:ext>
               </a:extLst>
             </a:blip>
@@ -27371,7 +27452,10 @@
         </p:spPr>
         <p:txBody>
           <a:bodyPr/>
-          <a:p/>
+          <a:lstStyle/>
+          <a:p>
+            <a:endParaRPr/>
+          </a:p>
         </p:txBody>
       </p:sp>
       <p:sp>
@@ -27413,10 +27497,10 @@
             </a:pathLst>
           </a:custGeom>
           <a:blipFill>
-            <a:blip>
+            <a:blip r:embed="rId2">
               <a:extLst>
                 <a:ext uri="{96DAC541-7B7A-43D3-8B79-37D633B846F1}">
-                  <asvg:svgBlip xmlns:asvg="http://schemas.microsoft.com/office/drawing/2016/SVG/main" r:embed="rId2"/>
+                  <asvg:svgBlip xmlns:asvg="http://schemas.microsoft.com/office/drawing/2016/SVG/main" r:embed="rId3"/>
                 </a:ext>
               </a:extLst>
             </a:blip>
@@ -27427,7 +27511,10 @@
         </p:spPr>
         <p:txBody>
           <a:bodyPr/>
-          <a:p/>
+          <a:lstStyle/>
+          <a:p>
+            <a:endParaRPr/>
+          </a:p>
         </p:txBody>
       </p:sp>
       <p:sp>
@@ -27469,10 +27556,10 @@
             </a:pathLst>
           </a:custGeom>
           <a:blipFill>
-            <a:blip>
+            <a:blip r:embed="rId4">
               <a:extLst>
                 <a:ext uri="{96DAC541-7B7A-43D3-8B79-37D633B846F1}">
-                  <asvg:svgBlip xmlns:asvg="http://schemas.microsoft.com/office/drawing/2016/SVG/main" r:embed="rId3"/>
+                  <asvg:svgBlip xmlns:asvg="http://schemas.microsoft.com/office/drawing/2016/SVG/main" r:embed="rId5"/>
                 </a:ext>
               </a:extLst>
             </a:blip>
@@ -27483,7 +27570,10 @@
         </p:spPr>
         <p:txBody>
           <a:bodyPr/>
-          <a:p/>
+          <a:lstStyle/>
+          <a:p>
+            <a:endParaRPr/>
+          </a:p>
         </p:txBody>
       </p:sp>
       <p:sp>
@@ -27525,10 +27615,10 @@
             </a:pathLst>
           </a:custGeom>
           <a:blipFill>
-            <a:blip>
+            <a:blip r:embed="rId6">
               <a:extLst>
                 <a:ext uri="{96DAC541-7B7A-43D3-8B79-37D633B846F1}">
-                  <asvg:svgBlip xmlns:asvg="http://schemas.microsoft.com/office/drawing/2016/SVG/main" r:embed="rId4"/>
+                  <asvg:svgBlip xmlns:asvg="http://schemas.microsoft.com/office/drawing/2016/SVG/main" r:embed="rId7"/>
                 </a:ext>
               </a:extLst>
             </a:blip>
@@ -27539,7 +27629,10 @@
         </p:spPr>
         <p:txBody>
           <a:bodyPr/>
-          <a:p/>
+          <a:lstStyle/>
+          <a:p>
+            <a:endParaRPr/>
+          </a:p>
         </p:txBody>
       </p:sp>
       <p:sp>
@@ -27595,7 +27688,7 @@
 </file>
 
 <file path=ppt/slides/slide48.xml><?xml version="1.0" encoding="utf-8"?>
-<p:sld xmlns:a="http://schemas.openxmlformats.org/drawingml/2006/main" xmlns:p="http://schemas.openxmlformats.org/presentationml/2006/main" xmlns:r="http://schemas.openxmlformats.org/officeDocument/2006/relationships">
+<p:sld xmlns:a="http://schemas.openxmlformats.org/drawingml/2006/main" xmlns:r="http://schemas.openxmlformats.org/officeDocument/2006/relationships" xmlns:p="http://schemas.openxmlformats.org/presentationml/2006/main">
   <p:cSld>
     <p:spTree>
       <p:nvGrpSpPr>
@@ -27603,7 +27696,14 @@
         <p:cNvGrpSpPr/>
         <p:nvPr/>
       </p:nvGrpSpPr>
-      <p:grpSpPr/>
+      <p:grpSpPr>
+        <a:xfrm>
+          <a:off x="0" y="0"/>
+          <a:ext cx="0" cy="0"/>
+          <a:chOff x="0" y="0"/>
+          <a:chExt cx="0" cy="0"/>
+        </a:xfrm>
+      </p:grpSpPr>
       <p:sp>
         <p:nvSpPr>
           <p:cNvPr id="2" name="TextBox 1"/>
@@ -27679,7 +27779,9 @@
               <a:t>DOI: 10.15680/IJMRSET.2024.0709023 | PDF: 16_Ekambareesh_2024_Heart_ML_Algorithms.pdf</a:t>
             </a:r>
           </a:p>
-          <a:p/>
+          <a:p>
+            <a:endParaRPr sz="1400"/>
+          </a:p>
           <a:p>
             <a:r>
               <a:rPr sz="1600" b="1"/>
@@ -27692,7 +27794,9 @@
               <a:t>• Directly supports AutoNAS baseline benchmarking on the same heart disease problem; provides classical-ML reference points that AutoNAS is designed to outperform with automated architecture search.</a:t>
             </a:r>
           </a:p>
-          <a:p/>
+          <a:p>
+            <a:endParaRPr sz="1300"/>
+          </a:p>
           <a:p>
             <a:r>
               <a:rPr sz="1600" b="1"/>
@@ -28720,14 +28824,14 @@
           <p:nvPr>
             <p:extLst>
               <p:ext uri="{D42A27DB-BD31-4B8C-83A1-F6EECF244321}">
-                <p14:modId xmlns:p14="http://schemas.microsoft.com/office/powerpoint/2010/main" val="2722669196"/>
+                <p14:modId xmlns:p14="http://schemas.microsoft.com/office/powerpoint/2010/main" val="3405490997"/>
               </p:ext>
             </p:extLst>
           </p:nvPr>
         </p:nvGraphicFramePr>
         <p:xfrm>
           <a:off x="878731" y="1685703"/>
-          <a:ext cx="16530537" cy="8359521"/>
+          <a:ext cx="16530537" cy="8173094"/>
         </p:xfrm>
         <a:graphic>
           <a:graphicData uri="http://schemas.openxmlformats.org/drawingml/2006/table">
@@ -28770,7 +28874,7 @@
                         <a:buAutoNum type="arabicPeriod" startAt="2"/>
                       </a:pPr>
                       <a:r>
-                        <a:rPr sz="1000">
+                        <a:rPr sz="2000" dirty="0">
                           <a:solidFill>
                             <a:srgbClr val="000000"/>
                           </a:solidFill>
@@ -28780,41 +28884,38 @@
                       </a:r>
                     </a:p>
                     <a:p>
-                      <a:r>
-                        <a:rPr sz="1000">
+                      <a:endParaRPr sz="2000" dirty="0">
+                        <a:solidFill>
+                          <a:srgbClr val="000000"/>
+                        </a:solidFill>
+                        <a:latin typeface="Merriweather"/>
+                      </a:endParaRPr>
+                    </a:p>
+                    <a:p>
+                      <a:r>
+                        <a:rPr sz="2000" b="1" dirty="0">
                           <a:solidFill>
                             <a:srgbClr val="000000"/>
                           </a:solidFill>
                           <a:latin typeface="Merriweather"/>
                         </a:rPr>
-                        <a:t/>
-                      </a:r>
-                    </a:p>
-                    <a:p>
-                      <a:r>
-                        <a:rPr sz="1000" b="1">
+                        <a:t>AUTHOR: H. Liu, K. Simonyan, Y. Yang</a:t>
+                      </a:r>
+                    </a:p>
+                    <a:p>
+                      <a:r>
+                        <a:rPr sz="2000" b="1" dirty="0">
                           <a:solidFill>
                             <a:srgbClr val="000000"/>
                           </a:solidFill>
                           <a:latin typeface="Merriweather"/>
                         </a:rPr>
-                        <a:t>AUTHOR: H. Liu, K. Simonyan, Y. Yang</a:t>
-                      </a:r>
-                    </a:p>
-                    <a:p>
-                      <a:r>
-                        <a:rPr sz="1000" b="1">
-                          <a:solidFill>
-                            <a:srgbClr val="000000"/>
-                          </a:solidFill>
-                          <a:latin typeface="Merriweather"/>
-                        </a:rPr>
                         <a:t>YEAR: 2019</a:t>
                       </a:r>
                     </a:p>
                     <a:p>
                       <a:r>
-                        <a:rPr sz="1000" b="1">
+                        <a:rPr sz="2000" b="1" dirty="0">
                           <a:solidFill>
                             <a:srgbClr val="000000"/>
                           </a:solidFill>
@@ -28877,7 +28978,7 @@
                         <a:buNone/>
                       </a:pPr>
                       <a:r>
-                        <a:rPr sz="1000" b="1">
+                        <a:rPr sz="2000" b="1">
                           <a:solidFill>
                             <a:srgbClr val="000000"/>
                           </a:solidFill>
@@ -28888,7 +28989,7 @@
                     </a:p>
                     <a:p>
                       <a:r>
-                        <a:rPr sz="900">
+                        <a:rPr sz="1800">
                           <a:solidFill>
                             <a:srgbClr val="000000"/>
                           </a:solidFill>
@@ -28899,7 +29000,7 @@
                     </a:p>
                     <a:p>
                       <a:r>
-                        <a:rPr sz="900">
+                        <a:rPr sz="1800">
                           <a:solidFill>
                             <a:srgbClr val="000000"/>
                           </a:solidFill>
@@ -28910,7 +29011,7 @@
                     </a:p>
                     <a:p>
                       <a:r>
-                        <a:rPr sz="900">
+                        <a:rPr sz="1800">
                           <a:solidFill>
                             <a:srgbClr val="000000"/>
                           </a:solidFill>
@@ -28921,7 +29022,7 @@
                     </a:p>
                     <a:p>
                       <a:r>
-                        <a:rPr sz="900">
+                        <a:rPr sz="1800">
                           <a:solidFill>
                             <a:srgbClr val="000000"/>
                           </a:solidFill>
@@ -28984,7 +29085,7 @@
                         <a:buNone/>
                       </a:pPr>
                       <a:r>
-                        <a:rPr sz="1000" b="1">
+                        <a:rPr sz="2000" b="1">
                           <a:solidFill>
                             <a:srgbClr val="000000"/>
                           </a:solidFill>
@@ -28995,7 +29096,7 @@
                     </a:p>
                     <a:p>
                       <a:r>
-                        <a:rPr sz="900">
+                        <a:rPr sz="1800">
                           <a:solidFill>
                             <a:srgbClr val="000000"/>
                           </a:solidFill>
@@ -29006,7 +29107,7 @@
                     </a:p>
                     <a:p>
                       <a:r>
-                        <a:rPr sz="900">
+                        <a:rPr sz="1800">
                           <a:solidFill>
                             <a:srgbClr val="000000"/>
                           </a:solidFill>
@@ -29017,7 +29118,7 @@
                     </a:p>
                     <a:p>
                       <a:r>
-                        <a:rPr sz="900">
+                        <a:rPr sz="1800">
                           <a:solidFill>
                             <a:srgbClr val="000000"/>
                           </a:solidFill>
@@ -29028,7 +29129,7 @@
                     </a:p>
                     <a:p>
                       <a:r>
-                        <a:rPr sz="900">
+                        <a:rPr sz="1800">
                           <a:solidFill>
                             <a:srgbClr val="000000"/>
                           </a:solidFill>
@@ -29094,15 +29195,6 @@
                         <a:buFont typeface="Arial" panose="020B0604020202020204" pitchFamily="34" charset="0"/>
                         <a:buNone/>
                       </a:pPr>
-                      <a:r>
-                        <a:rPr sz="1000">
-                          <a:solidFill>
-                            <a:srgbClr val="000000"/>
-                          </a:solidFill>
-                          <a:latin typeface="Merriweather"/>
-                        </a:rPr>
-                        <a:t/>
-                      </a:r>
                       <a:endParaRPr lang="en-IN" dirty="0"/>
                     </a:p>
                   </a:txBody>
@@ -29159,7 +29251,7 @@
                         <a:buNone/>
                       </a:pPr>
                       <a:r>
-                        <a:rPr sz="1000">
+                        <a:rPr sz="2000">
                           <a:solidFill>
                             <a:srgbClr val="000000"/>
                           </a:solidFill>
@@ -29170,7 +29262,7 @@
                     </a:p>
                     <a:p>
                       <a:r>
-                        <a:rPr sz="900">
+                        <a:rPr sz="1800">
                           <a:solidFill>
                             <a:srgbClr val="000000"/>
                           </a:solidFill>
@@ -29181,7 +29273,7 @@
                     </a:p>
                     <a:p>
                       <a:r>
-                        <a:rPr sz="900">
+                        <a:rPr sz="1800">
                           <a:solidFill>
                             <a:srgbClr val="000000"/>
                           </a:solidFill>
@@ -29192,7 +29284,7 @@
                     </a:p>
                     <a:p>
                       <a:r>
-                        <a:rPr sz="900">
+                        <a:rPr sz="1800">
                           <a:solidFill>
                             <a:srgbClr val="000000"/>
                           </a:solidFill>
@@ -29255,7 +29347,7 @@
                         <a:buNone/>
                       </a:pPr>
                       <a:r>
-                        <a:rPr sz="1000" b="1">
+                        <a:rPr sz="2000" b="1">
                           <a:solidFill>
                             <a:srgbClr val="000000"/>
                           </a:solidFill>
@@ -29266,7 +29358,7 @@
                     </a:p>
                     <a:p>
                       <a:r>
-                        <a:rPr sz="900">
+                        <a:rPr sz="1800">
                           <a:solidFill>
                             <a:srgbClr val="000000"/>
                           </a:solidFill>
@@ -29277,7 +29369,7 @@
                     </a:p>
                     <a:p>
                       <a:r>
-                        <a:rPr sz="900">
+                        <a:rPr sz="1800">
                           <a:solidFill>
                             <a:srgbClr val="000000"/>
                           </a:solidFill>
@@ -29288,7 +29380,7 @@
                     </a:p>
                     <a:p>
                       <a:r>
-                        <a:rPr sz="900">
+                        <a:rPr sz="1800">
                           <a:solidFill>
                             <a:srgbClr val="000000"/>
                           </a:solidFill>
@@ -29299,7 +29391,7 @@
                     </a:p>
                     <a:p>
                       <a:r>
-                        <a:rPr sz="900">
+                        <a:rPr sz="1800">
                           <a:solidFill>
                             <a:srgbClr val="000000"/>
                           </a:solidFill>
@@ -29365,15 +29457,6 @@
                         <a:buFont typeface="Arial" panose="020B0604020202020204" pitchFamily="34" charset="0"/>
                         <a:buNone/>
                       </a:pPr>
-                      <a:r>
-                        <a:rPr sz="1000">
-                          <a:solidFill>
-                            <a:srgbClr val="000000"/>
-                          </a:solidFill>
-                          <a:latin typeface="Merriweather"/>
-                        </a:rPr>
-                        <a:t/>
-                      </a:r>
                       <a:endParaRPr lang="en-IN" dirty="0"/>
                     </a:p>
                   </a:txBody>
@@ -29430,7 +29513,7 @@
                         <a:buNone/>
                       </a:pPr>
                       <a:r>
-                        <a:rPr sz="1000">
+                        <a:rPr sz="2000">
                           <a:solidFill>
                             <a:srgbClr val="000000"/>
                           </a:solidFill>
@@ -29441,7 +29524,7 @@
                     </a:p>
                     <a:p>
                       <a:r>
-                        <a:rPr sz="900">
+                        <a:rPr sz="1800">
                           <a:solidFill>
                             <a:srgbClr val="000000"/>
                           </a:solidFill>
@@ -29452,7 +29535,7 @@
                     </a:p>
                     <a:p>
                       <a:r>
-                        <a:rPr sz="900">
+                        <a:rPr sz="1800">
                           <a:solidFill>
                             <a:srgbClr val="000000"/>
                           </a:solidFill>
@@ -29463,7 +29546,7 @@
                     </a:p>
                     <a:p>
                       <a:r>
-                        <a:rPr sz="900">
+                        <a:rPr sz="1800">
                           <a:solidFill>
                             <a:srgbClr val="000000"/>
                           </a:solidFill>
@@ -29474,7 +29557,7 @@
                     </a:p>
                     <a:p>
                       <a:r>
-                        <a:rPr sz="900">
+                        <a:rPr sz="1800">
                           <a:solidFill>
                             <a:srgbClr val="000000"/>
                           </a:solidFill>
@@ -29536,16 +29619,7 @@
                         <a:buFont typeface="Arial" panose="020B0604020202020204" pitchFamily="34" charset="0"/>
                         <a:buNone/>
                       </a:pPr>
-                      <a:r>
-                        <a:rPr sz="1000">
-                          <a:solidFill>
-                            <a:srgbClr val="000000"/>
-                          </a:solidFill>
-                          <a:latin typeface="Merriweather"/>
-                        </a:rPr>
-                        <a:t/>
-                      </a:r>
-                      <a:endParaRPr lang="en-IN" sz="2000" b="1" dirty="0">
+                      <a:endParaRPr lang="en-IN" sz="4800" b="1" dirty="0">
                         <a:latin typeface="Merriweather" panose="00000500000000000000" pitchFamily="2" charset="0"/>
                       </a:endParaRPr>
                     </a:p>
@@ -29696,14 +29770,14 @@
           <p:nvPr>
             <p:extLst>
               <p:ext uri="{D42A27DB-BD31-4B8C-83A1-F6EECF244321}">
-                <p14:modId xmlns:p14="http://schemas.microsoft.com/office/powerpoint/2010/main" val="2295069393"/>
+                <p14:modId xmlns:p14="http://schemas.microsoft.com/office/powerpoint/2010/main" val="1761036528"/>
               </p:ext>
             </p:extLst>
           </p:nvPr>
         </p:nvGraphicFramePr>
         <p:xfrm>
           <a:off x="914400" y="1866900"/>
-          <a:ext cx="16459200" cy="7992914"/>
+          <a:ext cx="16459200" cy="7068055"/>
         </p:xfrm>
         <a:graphic>
           <a:graphicData uri="http://schemas.openxmlformats.org/drawingml/2006/table">
@@ -29746,7 +29820,7 @@
                         <a:buAutoNum type="arabicPeriod" startAt="3"/>
                       </a:pPr>
                       <a:r>
-                        <a:rPr sz="1000">
+                        <a:rPr sz="1800" dirty="0">
                           <a:solidFill>
                             <a:srgbClr val="000000"/>
                           </a:solidFill>
@@ -29756,41 +29830,56 @@
                       </a:r>
                     </a:p>
                     <a:p>
-                      <a:r>
-                        <a:rPr sz="1000">
+                      <a:endParaRPr sz="1800" dirty="0">
+                        <a:solidFill>
+                          <a:srgbClr val="000000"/>
+                        </a:solidFill>
+                        <a:latin typeface="Merriweather"/>
+                      </a:endParaRPr>
+                    </a:p>
+                    <a:p>
+                      <a:r>
+                        <a:rPr sz="1800" b="1" dirty="0">
                           <a:solidFill>
                             <a:srgbClr val="000000"/>
                           </a:solidFill>
                           <a:latin typeface="Merriweather"/>
                         </a:rPr>
-                        <a:t/>
-                      </a:r>
-                    </a:p>
-                    <a:p>
-                      <a:r>
-                        <a:rPr sz="1000" b="1">
+                        <a:t>AUTHOR: V. V. Ramalingam, A. </a:t>
+                      </a:r>
+                      <a:r>
+                        <a:rPr sz="1800" b="1" dirty="0" err="1">
                           <a:solidFill>
                             <a:srgbClr val="000000"/>
                           </a:solidFill>
                           <a:latin typeface="Merriweather"/>
                         </a:rPr>
-                        <a:t>AUTHOR: V. V. Ramalingam, A. Dandapath, M. K. Raja</a:t>
-                      </a:r>
-                    </a:p>
-                    <a:p>
-                      <a:r>
-                        <a:rPr sz="1000" b="1">
+                        <a:t>Dandapath</a:t>
+                      </a:r>
+                      <a:r>
+                        <a:rPr sz="1800" b="1" dirty="0">
                           <a:solidFill>
                             <a:srgbClr val="000000"/>
                           </a:solidFill>
                           <a:latin typeface="Merriweather"/>
                         </a:rPr>
+                        <a:t>, M. K. Raja</a:t>
+                      </a:r>
+                    </a:p>
+                    <a:p>
+                      <a:r>
+                        <a:rPr sz="1800" b="1" dirty="0">
+                          <a:solidFill>
+                            <a:srgbClr val="000000"/>
+                          </a:solidFill>
+                          <a:latin typeface="Merriweather"/>
+                        </a:rPr>
                         <a:t>YEAR: 2018</a:t>
                       </a:r>
                     </a:p>
                     <a:p>
                       <a:r>
-                        <a:rPr sz="1000" b="1">
+                        <a:rPr sz="1800" b="1" dirty="0">
                           <a:solidFill>
                             <a:srgbClr val="000000"/>
                           </a:solidFill>
@@ -29853,7 +29942,7 @@
                         <a:buNone/>
                       </a:pPr>
                       <a:r>
-                        <a:rPr sz="1000" b="1">
+                        <a:rPr sz="1800" b="1">
                           <a:solidFill>
                             <a:srgbClr val="000000"/>
                           </a:solidFill>
@@ -29864,7 +29953,7 @@
                     </a:p>
                     <a:p>
                       <a:r>
-                        <a:rPr sz="900">
+                        <a:rPr sz="1600">
                           <a:solidFill>
                             <a:srgbClr val="000000"/>
                           </a:solidFill>
@@ -29875,7 +29964,7 @@
                     </a:p>
                     <a:p>
                       <a:r>
-                        <a:rPr sz="900">
+                        <a:rPr sz="1600">
                           <a:solidFill>
                             <a:srgbClr val="000000"/>
                           </a:solidFill>
@@ -29886,7 +29975,7 @@
                     </a:p>
                     <a:p>
                       <a:r>
-                        <a:rPr sz="900">
+                        <a:rPr sz="1600">
                           <a:solidFill>
                             <a:srgbClr val="000000"/>
                           </a:solidFill>
@@ -29897,7 +29986,7 @@
                     </a:p>
                     <a:p>
                       <a:r>
-                        <a:rPr sz="900">
+                        <a:rPr sz="1600">
                           <a:solidFill>
                             <a:srgbClr val="000000"/>
                           </a:solidFill>
@@ -29960,7 +30049,7 @@
                         <a:buNone/>
                       </a:pPr>
                       <a:r>
-                        <a:rPr sz="1000" b="1">
+                        <a:rPr sz="1800" b="1">
                           <a:solidFill>
                             <a:srgbClr val="000000"/>
                           </a:solidFill>
@@ -29971,7 +30060,7 @@
                     </a:p>
                     <a:p>
                       <a:r>
-                        <a:rPr sz="900">
+                        <a:rPr sz="1600">
                           <a:solidFill>
                             <a:srgbClr val="000000"/>
                           </a:solidFill>
@@ -29982,7 +30071,7 @@
                     </a:p>
                     <a:p>
                       <a:r>
-                        <a:rPr sz="900">
+                        <a:rPr sz="1600">
                           <a:solidFill>
                             <a:srgbClr val="000000"/>
                           </a:solidFill>
@@ -29993,7 +30082,7 @@
                     </a:p>
                     <a:p>
                       <a:r>
-                        <a:rPr sz="900">
+                        <a:rPr sz="1600">
                           <a:solidFill>
                             <a:srgbClr val="000000"/>
                           </a:solidFill>
@@ -30004,7 +30093,7 @@
                     </a:p>
                     <a:p>
                       <a:r>
-                        <a:rPr sz="900">
+                        <a:rPr sz="1600">
                           <a:solidFill>
                             <a:srgbClr val="000000"/>
                           </a:solidFill>
@@ -30070,15 +30159,6 @@
                         <a:buFont typeface="Arial" panose="020B0604020202020204" pitchFamily="34" charset="0"/>
                         <a:buNone/>
                       </a:pPr>
-                      <a:r>
-                        <a:rPr sz="1000">
-                          <a:solidFill>
-                            <a:srgbClr val="000000"/>
-                          </a:solidFill>
-                          <a:latin typeface="Merriweather"/>
-                        </a:rPr>
-                        <a:t/>
-                      </a:r>
                       <a:endParaRPr lang="en-IN" dirty="0"/>
                     </a:p>
                   </a:txBody>
@@ -30135,7 +30215,7 @@
                         <a:buNone/>
                       </a:pPr>
                       <a:r>
-                        <a:rPr sz="1000">
+                        <a:rPr sz="1800">
                           <a:solidFill>
                             <a:srgbClr val="000000"/>
                           </a:solidFill>
@@ -30146,7 +30226,7 @@
                     </a:p>
                     <a:p>
                       <a:r>
-                        <a:rPr sz="900">
+                        <a:rPr sz="1600">
                           <a:solidFill>
                             <a:srgbClr val="000000"/>
                           </a:solidFill>
@@ -30157,7 +30237,7 @@
                     </a:p>
                     <a:p>
                       <a:r>
-                        <a:rPr sz="900">
+                        <a:rPr sz="1600">
                           <a:solidFill>
                             <a:srgbClr val="000000"/>
                           </a:solidFill>
@@ -30168,7 +30248,7 @@
                     </a:p>
                     <a:p>
                       <a:r>
-                        <a:rPr sz="900">
+                        <a:rPr sz="1600">
                           <a:solidFill>
                             <a:srgbClr val="000000"/>
                           </a:solidFill>
@@ -30231,7 +30311,7 @@
                         <a:buNone/>
                       </a:pPr>
                       <a:r>
-                        <a:rPr sz="1000" b="1">
+                        <a:rPr sz="1800" b="1">
                           <a:solidFill>
                             <a:srgbClr val="000000"/>
                           </a:solidFill>
@@ -30242,7 +30322,7 @@
                     </a:p>
                     <a:p>
                       <a:r>
-                        <a:rPr sz="900">
+                        <a:rPr sz="1600">
                           <a:solidFill>
                             <a:srgbClr val="000000"/>
                           </a:solidFill>
@@ -30253,7 +30333,7 @@
                     </a:p>
                     <a:p>
                       <a:r>
-                        <a:rPr sz="900">
+                        <a:rPr sz="1600">
                           <a:solidFill>
                             <a:srgbClr val="000000"/>
                           </a:solidFill>
@@ -30264,7 +30344,7 @@
                     </a:p>
                     <a:p>
                       <a:r>
-                        <a:rPr sz="900">
+                        <a:rPr sz="1600">
                           <a:solidFill>
                             <a:srgbClr val="000000"/>
                           </a:solidFill>
@@ -30275,7 +30355,7 @@
                     </a:p>
                     <a:p>
                       <a:r>
-                        <a:rPr sz="900">
+                        <a:rPr sz="1600">
                           <a:solidFill>
                             <a:srgbClr val="000000"/>
                           </a:solidFill>
@@ -30341,15 +30421,6 @@
                         <a:buFont typeface="Arial" panose="020B0604020202020204" pitchFamily="34" charset="0"/>
                         <a:buNone/>
                       </a:pPr>
-                      <a:r>
-                        <a:rPr sz="1000">
-                          <a:solidFill>
-                            <a:srgbClr val="000000"/>
-                          </a:solidFill>
-                          <a:latin typeface="Merriweather"/>
-                        </a:rPr>
-                        <a:t/>
-                      </a:r>
                       <a:endParaRPr lang="en-IN" dirty="0"/>
                     </a:p>
                   </a:txBody>
@@ -30406,7 +30477,7 @@
                         <a:buNone/>
                       </a:pPr>
                       <a:r>
-                        <a:rPr sz="1000">
+                        <a:rPr sz="1800">
                           <a:solidFill>
                             <a:srgbClr val="000000"/>
                           </a:solidFill>
@@ -30417,7 +30488,7 @@
                     </a:p>
                     <a:p>
                       <a:r>
-                        <a:rPr sz="900">
+                        <a:rPr sz="1600">
                           <a:solidFill>
                             <a:srgbClr val="000000"/>
                           </a:solidFill>
@@ -30428,7 +30499,7 @@
                     </a:p>
                     <a:p>
                       <a:r>
-                        <a:rPr sz="1000">
+                        <a:rPr sz="1800">
                           <a:solidFill>
                             <a:srgbClr val="000000"/>
                           </a:solidFill>
@@ -30439,7 +30510,7 @@
                     </a:p>
                     <a:p>
                       <a:r>
-                        <a:rPr sz="1000">
+                        <a:rPr sz="1800">
                           <a:solidFill>
                             <a:srgbClr val="000000"/>
                           </a:solidFill>
@@ -30450,7 +30521,7 @@
                     </a:p>
                     <a:p>
                       <a:r>
-                        <a:rPr sz="1000">
+                        <a:rPr sz="1800">
                           <a:solidFill>
                             <a:srgbClr val="000000"/>
                           </a:solidFill>
@@ -30512,16 +30583,7 @@
                         <a:buFont typeface="Arial" panose="020B0604020202020204" pitchFamily="34" charset="0"/>
                         <a:buNone/>
                       </a:pPr>
-                      <a:r>
-                        <a:rPr sz="1000">
-                          <a:solidFill>
-                            <a:srgbClr val="000000"/>
-                          </a:solidFill>
-                          <a:latin typeface="Merriweather"/>
-                        </a:rPr>
-                        <a:t/>
-                      </a:r>
-                      <a:endParaRPr lang="en-IN" sz="2000" b="1" dirty="0">
+                      <a:endParaRPr lang="en-IN" sz="4400" b="1" dirty="0">
                         <a:latin typeface="Merriweather" panose="00000500000000000000" pitchFamily="2" charset="0"/>
                       </a:endParaRPr>
                     </a:p>
